--- a/img/簡報1.pptx
+++ b/img/簡報1.pptx
@@ -5,8 +5,26 @@
     <p:sldMasterId id="2147483648" r:id="rId1"/>
   </p:sldMasterIdLst>
   <p:sldIdLst>
-    <p:sldId id="256" r:id="rId2"/>
-    <p:sldId id="257" r:id="rId3"/>
+    <p:sldId id="270" r:id="rId2"/>
+    <p:sldId id="271" r:id="rId3"/>
+    <p:sldId id="272" r:id="rId4"/>
+    <p:sldId id="273" r:id="rId5"/>
+    <p:sldId id="274" r:id="rId6"/>
+    <p:sldId id="256" r:id="rId7"/>
+    <p:sldId id="258" r:id="rId8"/>
+    <p:sldId id="267" r:id="rId9"/>
+    <p:sldId id="268" r:id="rId10"/>
+    <p:sldId id="269" r:id="rId11"/>
+    <p:sldId id="279" r:id="rId12"/>
+    <p:sldId id="280" r:id="rId13"/>
+    <p:sldId id="282" r:id="rId14"/>
+    <p:sldId id="281" r:id="rId15"/>
+    <p:sldId id="283" r:id="rId16"/>
+    <p:sldId id="257" r:id="rId17"/>
+    <p:sldId id="275" r:id="rId18"/>
+    <p:sldId id="276" r:id="rId19"/>
+    <p:sldId id="277" r:id="rId20"/>
+    <p:sldId id="278" r:id="rId21"/>
   </p:sldIdLst>
   <p:sldSz cx="12192000" cy="6858000"/>
   <p:notesSz cx="6858000" cy="9144000"/>
@@ -105,6 +123,11 @@
       </a:defRPr>
     </a:lvl9pPr>
   </p:defaultTextStyle>
+  <p:extLst>
+    <p:ext uri="{EFAFB233-063F-42B5-8137-9DF3F51BA10A}">
+      <p15:sldGuideLst xmlns:p15="http://schemas.microsoft.com/office/powerpoint/2012/main"/>
+    </p:ext>
+  </p:extLst>
 </p:presentation>
 </file>
 
@@ -255,7 +278,7 @@
           <a:p>
             <a:fld id="{CE1AF6E7-6439-4794-96EC-B314F0A2B304}" type="datetimeFigureOut">
               <a:rPr lang="zh-TW" altLang="en-US" smtClean="0"/>
-              <a:t>2024/9/3</a:t>
+              <a:t>2024/9/30</a:t>
             </a:fld>
             <a:endParaRPr lang="zh-TW" altLang="en-US"/>
           </a:p>
@@ -453,7 +476,7 @@
           <a:p>
             <a:fld id="{CE1AF6E7-6439-4794-96EC-B314F0A2B304}" type="datetimeFigureOut">
               <a:rPr lang="zh-TW" altLang="en-US" smtClean="0"/>
-              <a:t>2024/9/3</a:t>
+              <a:t>2024/9/30</a:t>
             </a:fld>
             <a:endParaRPr lang="zh-TW" altLang="en-US"/>
           </a:p>
@@ -661,7 +684,7 @@
           <a:p>
             <a:fld id="{CE1AF6E7-6439-4794-96EC-B314F0A2B304}" type="datetimeFigureOut">
               <a:rPr lang="zh-TW" altLang="en-US" smtClean="0"/>
-              <a:t>2024/9/3</a:t>
+              <a:t>2024/9/30</a:t>
             </a:fld>
             <a:endParaRPr lang="zh-TW" altLang="en-US"/>
           </a:p>
@@ -859,7 +882,7 @@
           <a:p>
             <a:fld id="{CE1AF6E7-6439-4794-96EC-B314F0A2B304}" type="datetimeFigureOut">
               <a:rPr lang="zh-TW" altLang="en-US" smtClean="0"/>
-              <a:t>2024/9/3</a:t>
+              <a:t>2024/9/30</a:t>
             </a:fld>
             <a:endParaRPr lang="zh-TW" altLang="en-US"/>
           </a:p>
@@ -1134,7 +1157,7 @@
           <a:p>
             <a:fld id="{CE1AF6E7-6439-4794-96EC-B314F0A2B304}" type="datetimeFigureOut">
               <a:rPr lang="zh-TW" altLang="en-US" smtClean="0"/>
-              <a:t>2024/9/3</a:t>
+              <a:t>2024/9/30</a:t>
             </a:fld>
             <a:endParaRPr lang="zh-TW" altLang="en-US"/>
           </a:p>
@@ -1399,7 +1422,7 @@
           <a:p>
             <a:fld id="{CE1AF6E7-6439-4794-96EC-B314F0A2B304}" type="datetimeFigureOut">
               <a:rPr lang="zh-TW" altLang="en-US" smtClean="0"/>
-              <a:t>2024/9/3</a:t>
+              <a:t>2024/9/30</a:t>
             </a:fld>
             <a:endParaRPr lang="zh-TW" altLang="en-US"/>
           </a:p>
@@ -1811,7 +1834,7 @@
           <a:p>
             <a:fld id="{CE1AF6E7-6439-4794-96EC-B314F0A2B304}" type="datetimeFigureOut">
               <a:rPr lang="zh-TW" altLang="en-US" smtClean="0"/>
-              <a:t>2024/9/3</a:t>
+              <a:t>2024/9/30</a:t>
             </a:fld>
             <a:endParaRPr lang="zh-TW" altLang="en-US"/>
           </a:p>
@@ -1952,7 +1975,7 @@
           <a:p>
             <a:fld id="{CE1AF6E7-6439-4794-96EC-B314F0A2B304}" type="datetimeFigureOut">
               <a:rPr lang="zh-TW" altLang="en-US" smtClean="0"/>
-              <a:t>2024/9/3</a:t>
+              <a:t>2024/9/30</a:t>
             </a:fld>
             <a:endParaRPr lang="zh-TW" altLang="en-US"/>
           </a:p>
@@ -2065,7 +2088,7 @@
           <a:p>
             <a:fld id="{CE1AF6E7-6439-4794-96EC-B314F0A2B304}" type="datetimeFigureOut">
               <a:rPr lang="zh-TW" altLang="en-US" smtClean="0"/>
-              <a:t>2024/9/3</a:t>
+              <a:t>2024/9/30</a:t>
             </a:fld>
             <a:endParaRPr lang="zh-TW" altLang="en-US"/>
           </a:p>
@@ -2376,7 +2399,7 @@
           <a:p>
             <a:fld id="{CE1AF6E7-6439-4794-96EC-B314F0A2B304}" type="datetimeFigureOut">
               <a:rPr lang="zh-TW" altLang="en-US" smtClean="0"/>
-              <a:t>2024/9/3</a:t>
+              <a:t>2024/9/30</a:t>
             </a:fld>
             <a:endParaRPr lang="zh-TW" altLang="en-US"/>
           </a:p>
@@ -2664,7 +2687,7 @@
           <a:p>
             <a:fld id="{CE1AF6E7-6439-4794-96EC-B314F0A2B304}" type="datetimeFigureOut">
               <a:rPr lang="zh-TW" altLang="en-US" smtClean="0"/>
-              <a:t>2024/9/3</a:t>
+              <a:t>2024/9/30</a:t>
             </a:fld>
             <a:endParaRPr lang="zh-TW" altLang="en-US"/>
           </a:p>
@@ -2905,7 +2928,7 @@
           <a:p>
             <a:fld id="{CE1AF6E7-6439-4794-96EC-B314F0A2B304}" type="datetimeFigureOut">
               <a:rPr lang="zh-TW" altLang="en-US" smtClean="0"/>
-              <a:t>2024/9/3</a:t>
+              <a:t>2024/9/30</a:t>
             </a:fld>
             <a:endParaRPr lang="zh-TW" altLang="en-US"/>
           </a:p>
@@ -3324,10 +3347,10 @@
       </p:grpSpPr>
       <p:pic>
         <p:nvPicPr>
-          <p:cNvPr id="5" name="圖片 4">
-            <a:extLst>
-              <a:ext uri="{FF2B5EF4-FFF2-40B4-BE49-F238E27FC236}">
-                <a16:creationId xmlns:a16="http://schemas.microsoft.com/office/drawing/2014/main" id="{FFFBD0EF-A120-4E65-AF7A-D634DF16F801}"/>
+          <p:cNvPr id="2" name="圖片 1">
+            <a:extLst>
+              <a:ext uri="{FF2B5EF4-FFF2-40B4-BE49-F238E27FC236}">
+                <a16:creationId xmlns:a16="http://schemas.microsoft.com/office/drawing/2014/main" id="{0D157D42-4CFC-4B7E-837B-D7ED878CB6E9}"/>
               </a:ext>
             </a:extLst>
           </p:cNvPr>
@@ -3360,10 +3383,64 @@
       </p:pic>
       <p:sp>
         <p:nvSpPr>
-          <p:cNvPr id="6" name="文字方塊 5">
-            <a:extLst>
-              <a:ext uri="{FF2B5EF4-FFF2-40B4-BE49-F238E27FC236}">
-                <a16:creationId xmlns:a16="http://schemas.microsoft.com/office/drawing/2014/main" id="{6B2548C2-D8FB-4034-877C-AEAF62DD46E9}"/>
+          <p:cNvPr id="3" name="矩形 2">
+            <a:extLst>
+              <a:ext uri="{FF2B5EF4-FFF2-40B4-BE49-F238E27FC236}">
+                <a16:creationId xmlns:a16="http://schemas.microsoft.com/office/drawing/2014/main" id="{ABD78525-31C3-4F24-AD6B-F2548B76430A}"/>
+              </a:ext>
+            </a:extLst>
+          </p:cNvPr>
+          <p:cNvSpPr/>
+          <p:nvPr/>
+        </p:nvSpPr>
+        <p:spPr>
+          <a:xfrm>
+            <a:off x="4742903" y="1779889"/>
+            <a:ext cx="2725200" cy="3297600"/>
+          </a:xfrm>
+          <a:prstGeom prst="rect">
+            <a:avLst/>
+          </a:prstGeom>
+          <a:solidFill>
+            <a:schemeClr val="tx1">
+              <a:alpha val="55000"/>
+            </a:schemeClr>
+          </a:solidFill>
+          <a:ln>
+            <a:noFill/>
+          </a:ln>
+        </p:spPr>
+        <p:style>
+          <a:lnRef idx="2">
+            <a:schemeClr val="accent1">
+              <a:shade val="50000"/>
+            </a:schemeClr>
+          </a:lnRef>
+          <a:fillRef idx="1">
+            <a:schemeClr val="accent1"/>
+          </a:fillRef>
+          <a:effectRef idx="0">
+            <a:schemeClr val="accent1"/>
+          </a:effectRef>
+          <a:fontRef idx="minor">
+            <a:schemeClr val="lt1"/>
+          </a:fontRef>
+        </p:style>
+        <p:txBody>
+          <a:bodyPr rtlCol="0" anchor="ctr"/>
+          <a:lstStyle/>
+          <a:p>
+            <a:pPr algn="ctr"/>
+            <a:endParaRPr lang="zh-TW" altLang="en-US"/>
+          </a:p>
+        </p:txBody>
+      </p:sp>
+      <p:sp>
+        <p:nvSpPr>
+          <p:cNvPr id="4" name="文字方塊 3">
+            <a:extLst>
+              <a:ext uri="{FF2B5EF4-FFF2-40B4-BE49-F238E27FC236}">
+                <a16:creationId xmlns:a16="http://schemas.microsoft.com/office/drawing/2014/main" id="{2546F4A6-33C9-4506-9975-A47B6076DA54}"/>
               </a:ext>
             </a:extLst>
           </p:cNvPr>
@@ -3372,8 +3449,8 @@
         </p:nvSpPr>
         <p:spPr>
           <a:xfrm>
-            <a:off x="4742903" y="2505667"/>
-            <a:ext cx="2706194" cy="1846659"/>
+            <a:off x="4742903" y="2797747"/>
+            <a:ext cx="2706194" cy="1261884"/>
           </a:xfrm>
           <a:prstGeom prst="rect">
             <a:avLst/>
@@ -3388,216 +3465,2070 @@
           <a:p>
             <a:pPr algn="ctr"/>
             <a:r>
-              <a:rPr lang="zh-TW" altLang="en-US" sz="3800" dirty="0">
-                <a:ln>
-                  <a:solidFill>
-                    <a:schemeClr val="tx1"/>
-                  </a:solidFill>
-                </a:ln>
-                <a:gradFill flip="none" rotWithShape="1">
-                  <a:gsLst>
-                    <a:gs pos="0">
-                      <a:srgbClr val="00B050">
-                        <a:shade val="30000"/>
-                        <a:satMod val="115000"/>
-                      </a:srgbClr>
-                    </a:gs>
-                    <a:gs pos="50000">
-                      <a:srgbClr val="00B050">
-                        <a:shade val="67500"/>
-                        <a:satMod val="115000"/>
-                      </a:srgbClr>
-                    </a:gs>
-                    <a:gs pos="100000">
-                      <a:srgbClr val="00B050">
-                        <a:shade val="100000"/>
-                        <a:satMod val="115000"/>
-                      </a:srgbClr>
-                    </a:gs>
-                  </a:gsLst>
-                  <a:lin ang="10800000" scaled="1"/>
-                  <a:tileRect/>
-                </a:gradFill>
+              <a:rPr lang="zh-TW" altLang="en-US" sz="3800" b="1" dirty="0">
+                <a:solidFill>
+                  <a:schemeClr val="bg1"/>
+                </a:solidFill>
+                <a:latin typeface="微軟正黑體" panose="020B0604030504040204" pitchFamily="34" charset="-120"/>
+                <a:ea typeface="微軟正黑體" panose="020B0604030504040204" pitchFamily="34" charset="-120"/>
               </a:rPr>
-              <a:t>臺灣</a:t>
-            </a:r>
-            <a:endParaRPr lang="en-US" altLang="zh-TW" sz="3800" dirty="0">
-              <a:ln>
+              <a:t>綠色</a:t>
+            </a:r>
+            <a:endParaRPr lang="en-US" altLang="zh-TW" sz="3800" b="1" dirty="0">
+              <a:solidFill>
+                <a:schemeClr val="bg1"/>
+              </a:solidFill>
+              <a:latin typeface="微軟正黑體" panose="020B0604030504040204" pitchFamily="34" charset="-120"/>
+              <a:ea typeface="微軟正黑體" panose="020B0604030504040204" pitchFamily="34" charset="-120"/>
+            </a:endParaRPr>
+          </a:p>
+          <a:p>
+            <a:pPr algn="ctr"/>
+            <a:r>
+              <a:rPr lang="zh-TW" altLang="en-US" sz="3800" b="1" dirty="0">
                 <a:solidFill>
-                  <a:schemeClr val="tx1"/>
+                  <a:schemeClr val="bg1"/>
                 </a:solidFill>
-              </a:ln>
-              <a:gradFill flip="none" rotWithShape="1">
-                <a:gsLst>
-                  <a:gs pos="0">
-                    <a:srgbClr val="00B050">
-                      <a:shade val="30000"/>
-                      <a:satMod val="115000"/>
-                    </a:srgbClr>
-                  </a:gs>
-                  <a:gs pos="50000">
-                    <a:srgbClr val="00B050">
-                      <a:shade val="67500"/>
-                      <a:satMod val="115000"/>
-                    </a:srgbClr>
-                  </a:gs>
-                  <a:gs pos="100000">
-                    <a:srgbClr val="00B050">
-                      <a:shade val="100000"/>
-                      <a:satMod val="115000"/>
-                    </a:srgbClr>
-                  </a:gs>
-                </a:gsLst>
-                <a:lin ang="10800000" scaled="1"/>
-                <a:tileRect/>
-              </a:gradFill>
+                <a:latin typeface="微軟正黑體" panose="020B0604030504040204" pitchFamily="34" charset="-120"/>
+                <a:ea typeface="微軟正黑體" panose="020B0604030504040204" pitchFamily="34" charset="-120"/>
+              </a:rPr>
+              <a:t>債券</a:t>
+            </a:r>
+            <a:endParaRPr lang="en-US" altLang="zh-TW" sz="3800" b="1" dirty="0">
+              <a:solidFill>
+                <a:schemeClr val="bg1"/>
+              </a:solidFill>
+              <a:latin typeface="微軟正黑體" panose="020B0604030504040204" pitchFamily="34" charset="-120"/>
+              <a:ea typeface="微軟正黑體" panose="020B0604030504040204" pitchFamily="34" charset="-120"/>
             </a:endParaRPr>
-          </a:p>
-          <a:p>
-            <a:pPr algn="ctr"/>
-            <a:r>
-              <a:rPr lang="zh-TW" altLang="en-US" sz="3800" dirty="0">
-                <a:ln>
-                  <a:solidFill>
-                    <a:schemeClr val="tx1"/>
-                  </a:solidFill>
-                </a:ln>
-                <a:gradFill flip="none" rotWithShape="1">
-                  <a:gsLst>
-                    <a:gs pos="0">
-                      <a:srgbClr val="00B050">
-                        <a:shade val="30000"/>
-                        <a:satMod val="115000"/>
-                      </a:srgbClr>
-                    </a:gs>
-                    <a:gs pos="50000">
-                      <a:srgbClr val="00B050">
-                        <a:shade val="67500"/>
-                        <a:satMod val="115000"/>
-                      </a:srgbClr>
-                    </a:gs>
-                    <a:gs pos="100000">
-                      <a:srgbClr val="00B050">
-                        <a:shade val="100000"/>
-                        <a:satMod val="115000"/>
-                      </a:srgbClr>
-                    </a:gs>
-                  </a:gsLst>
-                  <a:lin ang="10800000" scaled="1"/>
-                  <a:tileRect/>
-                </a:gradFill>
-              </a:rPr>
-              <a:t>第一檔</a:t>
-            </a:r>
-            <a:endParaRPr lang="en-US" altLang="zh-TW" sz="3800" dirty="0">
-              <a:ln>
-                <a:solidFill>
-                  <a:schemeClr val="tx1"/>
-                </a:solidFill>
-              </a:ln>
-              <a:gradFill flip="none" rotWithShape="1">
-                <a:gsLst>
-                  <a:gs pos="0">
-                    <a:srgbClr val="00B050">
-                      <a:shade val="30000"/>
-                      <a:satMod val="115000"/>
-                    </a:srgbClr>
-                  </a:gs>
-                  <a:gs pos="50000">
-                    <a:srgbClr val="00B050">
-                      <a:shade val="67500"/>
-                      <a:satMod val="115000"/>
-                    </a:srgbClr>
-                  </a:gs>
-                  <a:gs pos="100000">
-                    <a:srgbClr val="00B050">
-                      <a:shade val="100000"/>
-                      <a:satMod val="115000"/>
-                    </a:srgbClr>
-                  </a:gs>
-                </a:gsLst>
-                <a:lin ang="10800000" scaled="1"/>
-                <a:tileRect/>
-              </a:gradFill>
-            </a:endParaRPr>
-          </a:p>
-          <a:p>
-            <a:pPr algn="ctr"/>
-            <a:r>
-              <a:rPr lang="zh-TW" altLang="en-US" sz="3800" dirty="0">
-                <a:ln>
-                  <a:solidFill>
-                    <a:schemeClr val="tx1"/>
-                  </a:solidFill>
-                </a:ln>
-                <a:gradFill flip="none" rotWithShape="1">
-                  <a:gsLst>
-                    <a:gs pos="0">
-                      <a:srgbClr val="00B050">
-                        <a:shade val="30000"/>
-                        <a:satMod val="115000"/>
-                      </a:srgbClr>
-                    </a:gs>
-                    <a:gs pos="50000">
-                      <a:srgbClr val="00B050">
-                        <a:shade val="67500"/>
-                        <a:satMod val="115000"/>
-                      </a:srgbClr>
-                    </a:gs>
-                    <a:gs pos="100000">
-                      <a:srgbClr val="00B050">
-                        <a:shade val="100000"/>
-                        <a:satMod val="115000"/>
-                      </a:srgbClr>
-                    </a:gs>
-                  </a:gsLst>
-                  <a:lin ang="10800000" scaled="1"/>
-                  <a:tileRect/>
-                </a:gradFill>
-              </a:rPr>
-              <a:t>氣候</a:t>
-            </a:r>
-            <a:r>
-              <a:rPr lang="en-US" altLang="zh-TW" sz="3800" dirty="0">
-                <a:ln>
-                  <a:solidFill>
-                    <a:schemeClr val="tx1"/>
-                  </a:solidFill>
-                </a:ln>
-                <a:gradFill flip="none" rotWithShape="1">
-                  <a:gsLst>
-                    <a:gs pos="0">
-                      <a:srgbClr val="00B050">
-                        <a:shade val="30000"/>
-                        <a:satMod val="115000"/>
-                      </a:srgbClr>
-                    </a:gs>
-                    <a:gs pos="50000">
-                      <a:srgbClr val="00B050">
-                        <a:shade val="67500"/>
-                        <a:satMod val="115000"/>
-                      </a:srgbClr>
-                    </a:gs>
-                    <a:gs pos="100000">
-                      <a:srgbClr val="00B050">
-                        <a:shade val="100000"/>
-                        <a:satMod val="115000"/>
-                      </a:srgbClr>
-                    </a:gs>
-                  </a:gsLst>
-                  <a:lin ang="10800000" scaled="1"/>
-                  <a:tileRect/>
-                </a:gradFill>
-              </a:rPr>
-              <a:t>ETN</a:t>
-            </a:r>
           </a:p>
         </p:txBody>
       </p:sp>
     </p:spTree>
     <p:extLst>
       <p:ext uri="{BB962C8B-B14F-4D97-AF65-F5344CB8AC3E}">
-        <p14:creationId xmlns:p14="http://schemas.microsoft.com/office/powerpoint/2010/main" val="4001971282"/>
+        <p14:creationId xmlns:p14="http://schemas.microsoft.com/office/powerpoint/2010/main" val="3991475973"/>
+      </p:ext>
+    </p:extLst>
+  </p:cSld>
+  <p:clrMapOvr>
+    <a:masterClrMapping/>
+  </p:clrMapOvr>
+</p:sld>
+</file>
+
+<file path=ppt/slides/slide10.xml><?xml version="1.0" encoding="utf-8"?>
+<p:sld xmlns:a="http://schemas.openxmlformats.org/drawingml/2006/main" xmlns:r="http://schemas.openxmlformats.org/officeDocument/2006/relationships" xmlns:p="http://schemas.openxmlformats.org/presentationml/2006/main">
+  <p:cSld>
+    <p:spTree>
+      <p:nvGrpSpPr>
+        <p:cNvPr id="1" name=""/>
+        <p:cNvGrpSpPr/>
+        <p:nvPr/>
+      </p:nvGrpSpPr>
+      <p:grpSpPr>
+        <a:xfrm>
+          <a:off x="0" y="0"/>
+          <a:ext cx="0" cy="0"/>
+          <a:chOff x="0" y="0"/>
+          <a:chExt cx="0" cy="0"/>
+        </a:xfrm>
+      </p:grpSpPr>
+      <p:pic>
+        <p:nvPicPr>
+          <p:cNvPr id="2" name="圖片 1">
+            <a:extLst>
+              <a:ext uri="{FF2B5EF4-FFF2-40B4-BE49-F238E27FC236}">
+                <a16:creationId xmlns:a16="http://schemas.microsoft.com/office/drawing/2014/main" id="{3F8813EE-89E6-462A-99A9-BE6C206D5637}"/>
+              </a:ext>
+            </a:extLst>
+          </p:cNvPr>
+          <p:cNvPicPr>
+            <a:picLocks noChangeAspect="1"/>
+          </p:cNvPicPr>
+          <p:nvPr/>
+        </p:nvPicPr>
+        <p:blipFill>
+          <a:blip r:embed="rId2">
+            <a:extLst>
+              <a:ext uri="{28A0092B-C50C-407E-A947-70E740481C1C}">
+                <a14:useLocalDpi xmlns:a14="http://schemas.microsoft.com/office/drawing/2010/main" val="0"/>
+              </a:ext>
+            </a:extLst>
+          </a:blip>
+          <a:stretch>
+            <a:fillRect/>
+          </a:stretch>
+        </p:blipFill>
+        <p:spPr>
+          <a:xfrm>
+            <a:off x="4742903" y="1780506"/>
+            <a:ext cx="2706194" cy="3296983"/>
+          </a:xfrm>
+          <a:prstGeom prst="rect">
+            <a:avLst/>
+          </a:prstGeom>
+        </p:spPr>
+      </p:pic>
+      <p:sp>
+        <p:nvSpPr>
+          <p:cNvPr id="3" name="矩形 2">
+            <a:extLst>
+              <a:ext uri="{FF2B5EF4-FFF2-40B4-BE49-F238E27FC236}">
+                <a16:creationId xmlns:a16="http://schemas.microsoft.com/office/drawing/2014/main" id="{3DEB8F18-7763-42C8-AE9C-C0B978E9AA11}"/>
+              </a:ext>
+            </a:extLst>
+          </p:cNvPr>
+          <p:cNvSpPr/>
+          <p:nvPr/>
+        </p:nvSpPr>
+        <p:spPr>
+          <a:xfrm>
+            <a:off x="4742903" y="1779889"/>
+            <a:ext cx="2725200" cy="3297600"/>
+          </a:xfrm>
+          <a:prstGeom prst="rect">
+            <a:avLst/>
+          </a:prstGeom>
+          <a:solidFill>
+            <a:schemeClr val="tx1">
+              <a:alpha val="55000"/>
+            </a:schemeClr>
+          </a:solidFill>
+          <a:ln>
+            <a:noFill/>
+          </a:ln>
+        </p:spPr>
+        <p:style>
+          <a:lnRef idx="2">
+            <a:schemeClr val="accent1">
+              <a:shade val="50000"/>
+            </a:schemeClr>
+          </a:lnRef>
+          <a:fillRef idx="1">
+            <a:schemeClr val="accent1"/>
+          </a:fillRef>
+          <a:effectRef idx="0">
+            <a:schemeClr val="accent1"/>
+          </a:effectRef>
+          <a:fontRef idx="minor">
+            <a:schemeClr val="lt1"/>
+          </a:fontRef>
+        </p:style>
+        <p:txBody>
+          <a:bodyPr rtlCol="0" anchor="ctr"/>
+          <a:lstStyle/>
+          <a:p>
+            <a:pPr algn="ctr"/>
+            <a:endParaRPr lang="zh-TW" altLang="en-US"/>
+          </a:p>
+        </p:txBody>
+      </p:sp>
+      <p:sp>
+        <p:nvSpPr>
+          <p:cNvPr id="4" name="文字方塊 3">
+            <a:extLst>
+              <a:ext uri="{FF2B5EF4-FFF2-40B4-BE49-F238E27FC236}">
+                <a16:creationId xmlns:a16="http://schemas.microsoft.com/office/drawing/2014/main" id="{64B7BD82-E337-4800-B67E-F098293A29BE}"/>
+              </a:ext>
+            </a:extLst>
+          </p:cNvPr>
+          <p:cNvSpPr txBox="1"/>
+          <p:nvPr/>
+        </p:nvSpPr>
+        <p:spPr>
+          <a:xfrm>
+            <a:off x="4742903" y="2505667"/>
+            <a:ext cx="2706194" cy="1846659"/>
+          </a:xfrm>
+          <a:prstGeom prst="rect">
+            <a:avLst/>
+          </a:prstGeom>
+          <a:noFill/>
+        </p:spPr>
+        <p:txBody>
+          <a:bodyPr wrap="square" rtlCol="0">
+            <a:spAutoFit/>
+          </a:bodyPr>
+          <a:lstStyle/>
+          <a:p>
+            <a:pPr algn="ctr"/>
+            <a:r>
+              <a:rPr lang="zh-TW" altLang="en-US" sz="3800" b="1" dirty="0">
+                <a:solidFill>
+                  <a:schemeClr val="bg1"/>
+                </a:solidFill>
+                <a:latin typeface="微軟正黑體" panose="020B0604030504040204" pitchFamily="34" charset="-120"/>
+                <a:ea typeface="微軟正黑體" panose="020B0604030504040204" pitchFamily="34" charset="-120"/>
+              </a:rPr>
+              <a:t>臺灣</a:t>
+            </a:r>
+            <a:endParaRPr lang="en-US" altLang="zh-TW" sz="3800" b="1" dirty="0">
+              <a:solidFill>
+                <a:schemeClr val="bg1"/>
+              </a:solidFill>
+              <a:latin typeface="微軟正黑體" panose="020B0604030504040204" pitchFamily="34" charset="-120"/>
+              <a:ea typeface="微軟正黑體" panose="020B0604030504040204" pitchFamily="34" charset="-120"/>
+            </a:endParaRPr>
+          </a:p>
+          <a:p>
+            <a:pPr algn="ctr"/>
+            <a:r>
+              <a:rPr lang="zh-TW" altLang="en-US" sz="3800" b="1" dirty="0">
+                <a:solidFill>
+                  <a:schemeClr val="bg1"/>
+                </a:solidFill>
+                <a:latin typeface="微軟正黑體" panose="020B0604030504040204" pitchFamily="34" charset="-120"/>
+                <a:ea typeface="微軟正黑體" panose="020B0604030504040204" pitchFamily="34" charset="-120"/>
+              </a:rPr>
+              <a:t>第一檔</a:t>
+            </a:r>
+            <a:endParaRPr lang="en-US" altLang="zh-TW" sz="3800" b="1" dirty="0">
+              <a:solidFill>
+                <a:schemeClr val="bg1"/>
+              </a:solidFill>
+              <a:latin typeface="微軟正黑體" panose="020B0604030504040204" pitchFamily="34" charset="-120"/>
+              <a:ea typeface="微軟正黑體" panose="020B0604030504040204" pitchFamily="34" charset="-120"/>
+            </a:endParaRPr>
+          </a:p>
+          <a:p>
+            <a:pPr algn="ctr"/>
+            <a:r>
+              <a:rPr lang="zh-TW" altLang="en-US" sz="3800" b="1" dirty="0">
+                <a:solidFill>
+                  <a:schemeClr val="bg1"/>
+                </a:solidFill>
+                <a:latin typeface="微軟正黑體" panose="020B0604030504040204" pitchFamily="34" charset="-120"/>
+                <a:ea typeface="微軟正黑體" panose="020B0604030504040204" pitchFamily="34" charset="-120"/>
+              </a:rPr>
+              <a:t>氣候</a:t>
+            </a:r>
+            <a:r>
+              <a:rPr lang="en-US" altLang="zh-TW" sz="3800" b="1" dirty="0">
+                <a:solidFill>
+                  <a:schemeClr val="bg1"/>
+                </a:solidFill>
+                <a:latin typeface="微軟正黑體" panose="020B0604030504040204" pitchFamily="34" charset="-120"/>
+                <a:ea typeface="微軟正黑體" panose="020B0604030504040204" pitchFamily="34" charset="-120"/>
+              </a:rPr>
+              <a:t>ETN</a:t>
+            </a:r>
+          </a:p>
+        </p:txBody>
+      </p:sp>
+    </p:spTree>
+    <p:extLst>
+      <p:ext uri="{BB962C8B-B14F-4D97-AF65-F5344CB8AC3E}">
+        <p14:creationId xmlns:p14="http://schemas.microsoft.com/office/powerpoint/2010/main" val="4210875424"/>
+      </p:ext>
+    </p:extLst>
+  </p:cSld>
+  <p:clrMapOvr>
+    <a:masterClrMapping/>
+  </p:clrMapOvr>
+</p:sld>
+</file>
+
+<file path=ppt/slides/slide11.xml><?xml version="1.0" encoding="utf-8"?>
+<p:sld xmlns:a="http://schemas.openxmlformats.org/drawingml/2006/main" xmlns:r="http://schemas.openxmlformats.org/officeDocument/2006/relationships" xmlns:p="http://schemas.openxmlformats.org/presentationml/2006/main">
+  <p:cSld>
+    <p:spTree>
+      <p:nvGrpSpPr>
+        <p:cNvPr id="1" name=""/>
+        <p:cNvGrpSpPr/>
+        <p:nvPr/>
+      </p:nvGrpSpPr>
+      <p:grpSpPr>
+        <a:xfrm>
+          <a:off x="0" y="0"/>
+          <a:ext cx="0" cy="0"/>
+          <a:chOff x="0" y="0"/>
+          <a:chExt cx="0" cy="0"/>
+        </a:xfrm>
+      </p:grpSpPr>
+      <p:pic>
+        <p:nvPicPr>
+          <p:cNvPr id="5" name="圖片 4">
+            <a:extLst>
+              <a:ext uri="{FF2B5EF4-FFF2-40B4-BE49-F238E27FC236}">
+                <a16:creationId xmlns:a16="http://schemas.microsoft.com/office/drawing/2014/main" id="{8A400D96-E098-41D2-A91B-9ECA52293B58}"/>
+              </a:ext>
+            </a:extLst>
+          </p:cNvPr>
+          <p:cNvPicPr>
+            <a:picLocks noChangeAspect="1"/>
+          </p:cNvPicPr>
+          <p:nvPr/>
+        </p:nvPicPr>
+        <p:blipFill>
+          <a:blip r:embed="rId2">
+            <a:extLst>
+              <a:ext uri="{28A0092B-C50C-407E-A947-70E740481C1C}">
+                <a14:useLocalDpi xmlns:a14="http://schemas.microsoft.com/office/drawing/2010/main" val="0"/>
+              </a:ext>
+            </a:extLst>
+          </a:blip>
+          <a:stretch>
+            <a:fillRect/>
+          </a:stretch>
+        </p:blipFill>
+        <p:spPr>
+          <a:xfrm>
+            <a:off x="4747667" y="1785273"/>
+            <a:ext cx="2696665" cy="3287454"/>
+          </a:xfrm>
+          <a:prstGeom prst="rect">
+            <a:avLst/>
+          </a:prstGeom>
+        </p:spPr>
+      </p:pic>
+      <p:sp>
+        <p:nvSpPr>
+          <p:cNvPr id="2" name="矩形 1">
+            <a:extLst>
+              <a:ext uri="{FF2B5EF4-FFF2-40B4-BE49-F238E27FC236}">
+                <a16:creationId xmlns:a16="http://schemas.microsoft.com/office/drawing/2014/main" id="{9B4AEE40-7564-9AB1-070F-7148E319AEC7}"/>
+              </a:ext>
+            </a:extLst>
+          </p:cNvPr>
+          <p:cNvSpPr/>
+          <p:nvPr/>
+        </p:nvSpPr>
+        <p:spPr>
+          <a:xfrm>
+            <a:off x="4742903" y="1779889"/>
+            <a:ext cx="2725200" cy="3297600"/>
+          </a:xfrm>
+          <a:prstGeom prst="rect">
+            <a:avLst/>
+          </a:prstGeom>
+          <a:solidFill>
+            <a:schemeClr val="bg1">
+              <a:alpha val="30000"/>
+            </a:schemeClr>
+          </a:solidFill>
+          <a:ln>
+            <a:noFill/>
+          </a:ln>
+        </p:spPr>
+        <p:style>
+          <a:lnRef idx="2">
+            <a:schemeClr val="accent1">
+              <a:shade val="50000"/>
+            </a:schemeClr>
+          </a:lnRef>
+          <a:fillRef idx="1">
+            <a:schemeClr val="accent1"/>
+          </a:fillRef>
+          <a:effectRef idx="0">
+            <a:schemeClr val="accent1"/>
+          </a:effectRef>
+          <a:fontRef idx="minor">
+            <a:schemeClr val="lt1"/>
+          </a:fontRef>
+        </p:style>
+        <p:txBody>
+          <a:bodyPr rtlCol="0" anchor="ctr"/>
+          <a:lstStyle/>
+          <a:p>
+            <a:pPr algn="ctr"/>
+            <a:endParaRPr lang="zh-TW" altLang="en-US"/>
+          </a:p>
+        </p:txBody>
+      </p:sp>
+      <p:sp>
+        <p:nvSpPr>
+          <p:cNvPr id="6" name="文字方塊 5">
+            <a:extLst>
+              <a:ext uri="{FF2B5EF4-FFF2-40B4-BE49-F238E27FC236}">
+                <a16:creationId xmlns:a16="http://schemas.microsoft.com/office/drawing/2014/main" id="{F436194E-B337-49D9-BAAE-6F0BBA69FC4E}"/>
+              </a:ext>
+            </a:extLst>
+          </p:cNvPr>
+          <p:cNvSpPr txBox="1"/>
+          <p:nvPr/>
+        </p:nvSpPr>
+        <p:spPr>
+          <a:xfrm>
+            <a:off x="4757170" y="2797747"/>
+            <a:ext cx="2696665" cy="1261884"/>
+          </a:xfrm>
+          <a:prstGeom prst="rect">
+            <a:avLst/>
+          </a:prstGeom>
+          <a:noFill/>
+        </p:spPr>
+        <p:txBody>
+          <a:bodyPr wrap="square" rtlCol="0">
+            <a:spAutoFit/>
+          </a:bodyPr>
+          <a:lstStyle/>
+          <a:p>
+            <a:pPr algn="ctr"/>
+            <a:r>
+              <a:rPr lang="zh-TW" altLang="en-US" sz="3800" b="1" dirty="0">
+                <a:solidFill>
+                  <a:srgbClr val="FFFF00"/>
+                </a:solidFill>
+                <a:latin typeface="微軟正黑體" panose="020B0604030504040204" pitchFamily="34" charset="-120"/>
+                <a:ea typeface="微軟正黑體" panose="020B0604030504040204" pitchFamily="34" charset="-120"/>
+                <a:cs typeface="Arial" panose="020B0604020202020204" pitchFamily="34" charset="0"/>
+              </a:rPr>
+              <a:t>綠色</a:t>
+            </a:r>
+            <a:endParaRPr lang="en-US" altLang="zh-TW" sz="3800" b="1" dirty="0">
+              <a:solidFill>
+                <a:srgbClr val="FFFF00"/>
+              </a:solidFill>
+              <a:latin typeface="微軟正黑體" panose="020B0604030504040204" pitchFamily="34" charset="-120"/>
+              <a:ea typeface="微軟正黑體" panose="020B0604030504040204" pitchFamily="34" charset="-120"/>
+              <a:cs typeface="Arial" panose="020B0604020202020204" pitchFamily="34" charset="0"/>
+            </a:endParaRPr>
+          </a:p>
+          <a:p>
+            <a:pPr algn="ctr"/>
+            <a:r>
+              <a:rPr lang="zh-TW" altLang="en-US" sz="3800" b="1" dirty="0">
+                <a:solidFill>
+                  <a:srgbClr val="FFFF00"/>
+                </a:solidFill>
+                <a:latin typeface="微軟正黑體" panose="020B0604030504040204" pitchFamily="34" charset="-120"/>
+                <a:ea typeface="微軟正黑體" panose="020B0604030504040204" pitchFamily="34" charset="-120"/>
+                <a:cs typeface="Arial" panose="020B0604020202020204" pitchFamily="34" charset="0"/>
+              </a:rPr>
+              <a:t>效益</a:t>
+            </a:r>
+            <a:endParaRPr lang="en-US" altLang="zh-TW" sz="3800" b="1" dirty="0">
+              <a:solidFill>
+                <a:srgbClr val="FFFF00"/>
+              </a:solidFill>
+              <a:latin typeface="微軟正黑體" panose="020B0604030504040204" pitchFamily="34" charset="-120"/>
+              <a:ea typeface="微軟正黑體" panose="020B0604030504040204" pitchFamily="34" charset="-120"/>
+              <a:cs typeface="Arial" panose="020B0604020202020204" pitchFamily="34" charset="0"/>
+            </a:endParaRPr>
+          </a:p>
+        </p:txBody>
+      </p:sp>
+    </p:spTree>
+    <p:extLst>
+      <p:ext uri="{BB962C8B-B14F-4D97-AF65-F5344CB8AC3E}">
+        <p14:creationId xmlns:p14="http://schemas.microsoft.com/office/powerpoint/2010/main" val="552674681"/>
+      </p:ext>
+    </p:extLst>
+  </p:cSld>
+  <p:clrMapOvr>
+    <a:masterClrMapping/>
+  </p:clrMapOvr>
+</p:sld>
+</file>
+
+<file path=ppt/slides/slide12.xml><?xml version="1.0" encoding="utf-8"?>
+<p:sld xmlns:a="http://schemas.openxmlformats.org/drawingml/2006/main" xmlns:r="http://schemas.openxmlformats.org/officeDocument/2006/relationships" xmlns:p="http://schemas.openxmlformats.org/presentationml/2006/main">
+  <p:cSld>
+    <p:spTree>
+      <p:nvGrpSpPr>
+        <p:cNvPr id="1" name=""/>
+        <p:cNvGrpSpPr/>
+        <p:nvPr/>
+      </p:nvGrpSpPr>
+      <p:grpSpPr>
+        <a:xfrm>
+          <a:off x="0" y="0"/>
+          <a:ext cx="0" cy="0"/>
+          <a:chOff x="0" y="0"/>
+          <a:chExt cx="0" cy="0"/>
+        </a:xfrm>
+      </p:grpSpPr>
+      <p:pic>
+        <p:nvPicPr>
+          <p:cNvPr id="5" name="圖片 4">
+            <a:extLst>
+              <a:ext uri="{FF2B5EF4-FFF2-40B4-BE49-F238E27FC236}">
+                <a16:creationId xmlns:a16="http://schemas.microsoft.com/office/drawing/2014/main" id="{8A400D96-E098-41D2-A91B-9ECA52293B58}"/>
+              </a:ext>
+            </a:extLst>
+          </p:cNvPr>
+          <p:cNvPicPr>
+            <a:picLocks noChangeAspect="1"/>
+          </p:cNvPicPr>
+          <p:nvPr/>
+        </p:nvPicPr>
+        <p:blipFill>
+          <a:blip r:embed="rId2">
+            <a:extLst>
+              <a:ext uri="{28A0092B-C50C-407E-A947-70E740481C1C}">
+                <a14:useLocalDpi xmlns:a14="http://schemas.microsoft.com/office/drawing/2010/main" val="0"/>
+              </a:ext>
+            </a:extLst>
+          </a:blip>
+          <a:stretch>
+            <a:fillRect/>
+          </a:stretch>
+        </p:blipFill>
+        <p:spPr>
+          <a:xfrm>
+            <a:off x="4747667" y="1785273"/>
+            <a:ext cx="2696665" cy="3287454"/>
+          </a:xfrm>
+          <a:prstGeom prst="rect">
+            <a:avLst/>
+          </a:prstGeom>
+        </p:spPr>
+      </p:pic>
+      <p:sp>
+        <p:nvSpPr>
+          <p:cNvPr id="2" name="矩形 1">
+            <a:extLst>
+              <a:ext uri="{FF2B5EF4-FFF2-40B4-BE49-F238E27FC236}">
+                <a16:creationId xmlns:a16="http://schemas.microsoft.com/office/drawing/2014/main" id="{9B4AEE40-7564-9AB1-070F-7148E319AEC7}"/>
+              </a:ext>
+            </a:extLst>
+          </p:cNvPr>
+          <p:cNvSpPr/>
+          <p:nvPr/>
+        </p:nvSpPr>
+        <p:spPr>
+          <a:xfrm>
+            <a:off x="4742903" y="1779889"/>
+            <a:ext cx="2725200" cy="3297600"/>
+          </a:xfrm>
+          <a:prstGeom prst="rect">
+            <a:avLst/>
+          </a:prstGeom>
+          <a:solidFill>
+            <a:schemeClr val="bg1">
+              <a:alpha val="30000"/>
+            </a:schemeClr>
+          </a:solidFill>
+          <a:ln>
+            <a:noFill/>
+          </a:ln>
+        </p:spPr>
+        <p:style>
+          <a:lnRef idx="2">
+            <a:schemeClr val="accent1">
+              <a:shade val="50000"/>
+            </a:schemeClr>
+          </a:lnRef>
+          <a:fillRef idx="1">
+            <a:schemeClr val="accent1"/>
+          </a:fillRef>
+          <a:effectRef idx="0">
+            <a:schemeClr val="accent1"/>
+          </a:effectRef>
+          <a:fontRef idx="minor">
+            <a:schemeClr val="lt1"/>
+          </a:fontRef>
+        </p:style>
+        <p:txBody>
+          <a:bodyPr rtlCol="0" anchor="ctr"/>
+          <a:lstStyle/>
+          <a:p>
+            <a:pPr algn="ctr"/>
+            <a:endParaRPr lang="zh-TW" altLang="en-US"/>
+          </a:p>
+        </p:txBody>
+      </p:sp>
+      <p:sp>
+        <p:nvSpPr>
+          <p:cNvPr id="6" name="文字方塊 5">
+            <a:extLst>
+              <a:ext uri="{FF2B5EF4-FFF2-40B4-BE49-F238E27FC236}">
+                <a16:creationId xmlns:a16="http://schemas.microsoft.com/office/drawing/2014/main" id="{F436194E-B337-49D9-BAAE-6F0BBA69FC4E}"/>
+              </a:ext>
+            </a:extLst>
+          </p:cNvPr>
+          <p:cNvSpPr txBox="1"/>
+          <p:nvPr/>
+        </p:nvSpPr>
+        <p:spPr>
+          <a:xfrm>
+            <a:off x="4747666" y="2797747"/>
+            <a:ext cx="2696665" cy="1261884"/>
+          </a:xfrm>
+          <a:prstGeom prst="rect">
+            <a:avLst/>
+          </a:prstGeom>
+          <a:noFill/>
+        </p:spPr>
+        <p:txBody>
+          <a:bodyPr wrap="square" rtlCol="0">
+            <a:spAutoFit/>
+          </a:bodyPr>
+          <a:lstStyle/>
+          <a:p>
+            <a:pPr algn="ctr"/>
+            <a:r>
+              <a:rPr lang="zh-TW" altLang="en-US" sz="3800" b="1" dirty="0">
+                <a:solidFill>
+                  <a:srgbClr val="FFFF00"/>
+                </a:solidFill>
+                <a:latin typeface="微軟正黑體" panose="020B0604030504040204" pitchFamily="34" charset="-120"/>
+                <a:ea typeface="微軟正黑體" panose="020B0604030504040204" pitchFamily="34" charset="-120"/>
+                <a:cs typeface="Arial" panose="020B0604020202020204" pitchFamily="34" charset="0"/>
+              </a:rPr>
+              <a:t>社會</a:t>
+            </a:r>
+            <a:endParaRPr lang="en-US" altLang="zh-TW" sz="3800" b="1" dirty="0">
+              <a:solidFill>
+                <a:srgbClr val="FFFF00"/>
+              </a:solidFill>
+              <a:latin typeface="微軟正黑體" panose="020B0604030504040204" pitchFamily="34" charset="-120"/>
+              <a:ea typeface="微軟正黑體" panose="020B0604030504040204" pitchFamily="34" charset="-120"/>
+              <a:cs typeface="Arial" panose="020B0604020202020204" pitchFamily="34" charset="0"/>
+            </a:endParaRPr>
+          </a:p>
+          <a:p>
+            <a:pPr algn="ctr"/>
+            <a:r>
+              <a:rPr lang="zh-TW" altLang="en-US" sz="3800" b="1" dirty="0">
+                <a:solidFill>
+                  <a:srgbClr val="FFFF00"/>
+                </a:solidFill>
+                <a:latin typeface="微軟正黑體" panose="020B0604030504040204" pitchFamily="34" charset="-120"/>
+                <a:ea typeface="微軟正黑體" panose="020B0604030504040204" pitchFamily="34" charset="-120"/>
+                <a:cs typeface="Arial" panose="020B0604020202020204" pitchFamily="34" charset="0"/>
+              </a:rPr>
+              <a:t>效益</a:t>
+            </a:r>
+            <a:endParaRPr lang="en-US" altLang="zh-TW" sz="3800" b="1" dirty="0">
+              <a:solidFill>
+                <a:srgbClr val="FFFF00"/>
+              </a:solidFill>
+              <a:latin typeface="微軟正黑體" panose="020B0604030504040204" pitchFamily="34" charset="-120"/>
+              <a:ea typeface="微軟正黑體" panose="020B0604030504040204" pitchFamily="34" charset="-120"/>
+              <a:cs typeface="Arial" panose="020B0604020202020204" pitchFamily="34" charset="0"/>
+            </a:endParaRPr>
+          </a:p>
+        </p:txBody>
+      </p:sp>
+    </p:spTree>
+    <p:extLst>
+      <p:ext uri="{BB962C8B-B14F-4D97-AF65-F5344CB8AC3E}">
+        <p14:creationId xmlns:p14="http://schemas.microsoft.com/office/powerpoint/2010/main" val="174678038"/>
+      </p:ext>
+    </p:extLst>
+  </p:cSld>
+  <p:clrMapOvr>
+    <a:masterClrMapping/>
+  </p:clrMapOvr>
+</p:sld>
+</file>
+
+<file path=ppt/slides/slide13.xml><?xml version="1.0" encoding="utf-8"?>
+<p:sld xmlns:a="http://schemas.openxmlformats.org/drawingml/2006/main" xmlns:r="http://schemas.openxmlformats.org/officeDocument/2006/relationships" xmlns:p="http://schemas.openxmlformats.org/presentationml/2006/main">
+  <p:cSld>
+    <p:spTree>
+      <p:nvGrpSpPr>
+        <p:cNvPr id="1" name=""/>
+        <p:cNvGrpSpPr/>
+        <p:nvPr/>
+      </p:nvGrpSpPr>
+      <p:grpSpPr>
+        <a:xfrm>
+          <a:off x="0" y="0"/>
+          <a:ext cx="0" cy="0"/>
+          <a:chOff x="0" y="0"/>
+          <a:chExt cx="0" cy="0"/>
+        </a:xfrm>
+      </p:grpSpPr>
+      <p:pic>
+        <p:nvPicPr>
+          <p:cNvPr id="5" name="圖片 4">
+            <a:extLst>
+              <a:ext uri="{FF2B5EF4-FFF2-40B4-BE49-F238E27FC236}">
+                <a16:creationId xmlns:a16="http://schemas.microsoft.com/office/drawing/2014/main" id="{8A400D96-E098-41D2-A91B-9ECA52293B58}"/>
+              </a:ext>
+            </a:extLst>
+          </p:cNvPr>
+          <p:cNvPicPr>
+            <a:picLocks noChangeAspect="1"/>
+          </p:cNvPicPr>
+          <p:nvPr/>
+        </p:nvPicPr>
+        <p:blipFill>
+          <a:blip r:embed="rId2">
+            <a:extLst>
+              <a:ext uri="{28A0092B-C50C-407E-A947-70E740481C1C}">
+                <a14:useLocalDpi xmlns:a14="http://schemas.microsoft.com/office/drawing/2010/main" val="0"/>
+              </a:ext>
+            </a:extLst>
+          </a:blip>
+          <a:stretch>
+            <a:fillRect/>
+          </a:stretch>
+        </p:blipFill>
+        <p:spPr>
+          <a:xfrm>
+            <a:off x="4747667" y="1785273"/>
+            <a:ext cx="2696665" cy="3287454"/>
+          </a:xfrm>
+          <a:prstGeom prst="rect">
+            <a:avLst/>
+          </a:prstGeom>
+        </p:spPr>
+      </p:pic>
+      <p:sp>
+        <p:nvSpPr>
+          <p:cNvPr id="2" name="矩形 1">
+            <a:extLst>
+              <a:ext uri="{FF2B5EF4-FFF2-40B4-BE49-F238E27FC236}">
+                <a16:creationId xmlns:a16="http://schemas.microsoft.com/office/drawing/2014/main" id="{9B4AEE40-7564-9AB1-070F-7148E319AEC7}"/>
+              </a:ext>
+            </a:extLst>
+          </p:cNvPr>
+          <p:cNvSpPr/>
+          <p:nvPr/>
+        </p:nvSpPr>
+        <p:spPr>
+          <a:xfrm>
+            <a:off x="4742903" y="1779889"/>
+            <a:ext cx="2725200" cy="3297600"/>
+          </a:xfrm>
+          <a:prstGeom prst="rect">
+            <a:avLst/>
+          </a:prstGeom>
+          <a:solidFill>
+            <a:schemeClr val="bg1">
+              <a:alpha val="30000"/>
+            </a:schemeClr>
+          </a:solidFill>
+          <a:ln>
+            <a:noFill/>
+          </a:ln>
+        </p:spPr>
+        <p:style>
+          <a:lnRef idx="2">
+            <a:schemeClr val="accent1">
+              <a:shade val="50000"/>
+            </a:schemeClr>
+          </a:lnRef>
+          <a:fillRef idx="1">
+            <a:schemeClr val="accent1"/>
+          </a:fillRef>
+          <a:effectRef idx="0">
+            <a:schemeClr val="accent1"/>
+          </a:effectRef>
+          <a:fontRef idx="minor">
+            <a:schemeClr val="lt1"/>
+          </a:fontRef>
+        </p:style>
+        <p:txBody>
+          <a:bodyPr rtlCol="0" anchor="ctr"/>
+          <a:lstStyle/>
+          <a:p>
+            <a:pPr algn="ctr"/>
+            <a:endParaRPr lang="zh-TW" altLang="en-US"/>
+          </a:p>
+        </p:txBody>
+      </p:sp>
+      <p:sp>
+        <p:nvSpPr>
+          <p:cNvPr id="6" name="文字方塊 5">
+            <a:extLst>
+              <a:ext uri="{FF2B5EF4-FFF2-40B4-BE49-F238E27FC236}">
+                <a16:creationId xmlns:a16="http://schemas.microsoft.com/office/drawing/2014/main" id="{F436194E-B337-49D9-BAAE-6F0BBA69FC4E}"/>
+              </a:ext>
+            </a:extLst>
+          </p:cNvPr>
+          <p:cNvSpPr txBox="1"/>
+          <p:nvPr/>
+        </p:nvSpPr>
+        <p:spPr>
+          <a:xfrm>
+            <a:off x="4747666" y="2505359"/>
+            <a:ext cx="2696665" cy="1846659"/>
+          </a:xfrm>
+          <a:prstGeom prst="rect">
+            <a:avLst/>
+          </a:prstGeom>
+          <a:noFill/>
+        </p:spPr>
+        <p:txBody>
+          <a:bodyPr wrap="square" rtlCol="0">
+            <a:spAutoFit/>
+          </a:bodyPr>
+          <a:lstStyle/>
+          <a:p>
+            <a:pPr algn="ctr"/>
+            <a:r>
+              <a:rPr lang="zh-TW" altLang="en-US" sz="3800" b="1" dirty="0">
+                <a:solidFill>
+                  <a:srgbClr val="FFFF00"/>
+                </a:solidFill>
+                <a:latin typeface="微軟正黑體" panose="020B0604030504040204" pitchFamily="34" charset="-120"/>
+                <a:ea typeface="微軟正黑體" panose="020B0604030504040204" pitchFamily="34" charset="-120"/>
+                <a:cs typeface="Arial" panose="020B0604020202020204" pitchFamily="34" charset="0"/>
+              </a:rPr>
+              <a:t>綠色</a:t>
+            </a:r>
+            <a:endParaRPr lang="en-US" altLang="zh-TW" sz="3800" b="1" dirty="0">
+              <a:solidFill>
+                <a:srgbClr val="FFFF00"/>
+              </a:solidFill>
+              <a:latin typeface="微軟正黑體" panose="020B0604030504040204" pitchFamily="34" charset="-120"/>
+              <a:ea typeface="微軟正黑體" panose="020B0604030504040204" pitchFamily="34" charset="-120"/>
+              <a:cs typeface="Arial" panose="020B0604020202020204" pitchFamily="34" charset="0"/>
+            </a:endParaRPr>
+          </a:p>
+          <a:p>
+            <a:pPr algn="ctr"/>
+            <a:r>
+              <a:rPr lang="en-US" altLang="zh-TW" sz="3800" b="1" dirty="0">
+                <a:solidFill>
+                  <a:srgbClr val="FFFF00"/>
+                </a:solidFill>
+                <a:latin typeface="微軟正黑體" panose="020B0604030504040204" pitchFamily="34" charset="-120"/>
+                <a:ea typeface="微軟正黑體" panose="020B0604030504040204" pitchFamily="34" charset="-120"/>
+                <a:cs typeface="Arial" panose="020B0604020202020204" pitchFamily="34" charset="0"/>
+              </a:rPr>
+              <a:t>+</a:t>
+            </a:r>
+          </a:p>
+          <a:p>
+            <a:pPr algn="ctr"/>
+            <a:r>
+              <a:rPr lang="zh-TW" altLang="en-US" sz="3800" b="1" dirty="0">
+                <a:solidFill>
+                  <a:srgbClr val="FFFF00"/>
+                </a:solidFill>
+                <a:latin typeface="微軟正黑體" panose="020B0604030504040204" pitchFamily="34" charset="-120"/>
+                <a:ea typeface="微軟正黑體" panose="020B0604030504040204" pitchFamily="34" charset="-120"/>
+                <a:cs typeface="Arial" panose="020B0604020202020204" pitchFamily="34" charset="0"/>
+              </a:rPr>
+              <a:t>社會效益</a:t>
+            </a:r>
+            <a:endParaRPr lang="en-US" altLang="zh-TW" sz="3800" b="1" dirty="0">
+              <a:solidFill>
+                <a:srgbClr val="FFFF00"/>
+              </a:solidFill>
+              <a:latin typeface="微軟正黑體" panose="020B0604030504040204" pitchFamily="34" charset="-120"/>
+              <a:ea typeface="微軟正黑體" panose="020B0604030504040204" pitchFamily="34" charset="-120"/>
+              <a:cs typeface="Arial" panose="020B0604020202020204" pitchFamily="34" charset="0"/>
+            </a:endParaRPr>
+          </a:p>
+        </p:txBody>
+      </p:sp>
+    </p:spTree>
+    <p:extLst>
+      <p:ext uri="{BB962C8B-B14F-4D97-AF65-F5344CB8AC3E}">
+        <p14:creationId xmlns:p14="http://schemas.microsoft.com/office/powerpoint/2010/main" val="243243958"/>
+      </p:ext>
+    </p:extLst>
+  </p:cSld>
+  <p:clrMapOvr>
+    <a:masterClrMapping/>
+  </p:clrMapOvr>
+</p:sld>
+</file>
+
+<file path=ppt/slides/slide14.xml><?xml version="1.0" encoding="utf-8"?>
+<p:sld xmlns:a="http://schemas.openxmlformats.org/drawingml/2006/main" xmlns:r="http://schemas.openxmlformats.org/officeDocument/2006/relationships" xmlns:p="http://schemas.openxmlformats.org/presentationml/2006/main">
+  <p:cSld>
+    <p:spTree>
+      <p:nvGrpSpPr>
+        <p:cNvPr id="1" name=""/>
+        <p:cNvGrpSpPr/>
+        <p:nvPr/>
+      </p:nvGrpSpPr>
+      <p:grpSpPr>
+        <a:xfrm>
+          <a:off x="0" y="0"/>
+          <a:ext cx="0" cy="0"/>
+          <a:chOff x="0" y="0"/>
+          <a:chExt cx="0" cy="0"/>
+        </a:xfrm>
+      </p:grpSpPr>
+      <p:pic>
+        <p:nvPicPr>
+          <p:cNvPr id="5" name="圖片 4">
+            <a:extLst>
+              <a:ext uri="{FF2B5EF4-FFF2-40B4-BE49-F238E27FC236}">
+                <a16:creationId xmlns:a16="http://schemas.microsoft.com/office/drawing/2014/main" id="{8A400D96-E098-41D2-A91B-9ECA52293B58}"/>
+              </a:ext>
+            </a:extLst>
+          </p:cNvPr>
+          <p:cNvPicPr>
+            <a:picLocks noChangeAspect="1"/>
+          </p:cNvPicPr>
+          <p:nvPr/>
+        </p:nvPicPr>
+        <p:blipFill>
+          <a:blip r:embed="rId2">
+            <a:extLst>
+              <a:ext uri="{28A0092B-C50C-407E-A947-70E740481C1C}">
+                <a14:useLocalDpi xmlns:a14="http://schemas.microsoft.com/office/drawing/2010/main" val="0"/>
+              </a:ext>
+            </a:extLst>
+          </a:blip>
+          <a:stretch>
+            <a:fillRect/>
+          </a:stretch>
+        </p:blipFill>
+        <p:spPr>
+          <a:xfrm>
+            <a:off x="4747667" y="1785273"/>
+            <a:ext cx="2696665" cy="3287454"/>
+          </a:xfrm>
+          <a:prstGeom prst="rect">
+            <a:avLst/>
+          </a:prstGeom>
+        </p:spPr>
+      </p:pic>
+      <p:sp>
+        <p:nvSpPr>
+          <p:cNvPr id="2" name="矩形 1">
+            <a:extLst>
+              <a:ext uri="{FF2B5EF4-FFF2-40B4-BE49-F238E27FC236}">
+                <a16:creationId xmlns:a16="http://schemas.microsoft.com/office/drawing/2014/main" id="{9B4AEE40-7564-9AB1-070F-7148E319AEC7}"/>
+              </a:ext>
+            </a:extLst>
+          </p:cNvPr>
+          <p:cNvSpPr/>
+          <p:nvPr/>
+        </p:nvSpPr>
+        <p:spPr>
+          <a:xfrm>
+            <a:off x="4742903" y="1779889"/>
+            <a:ext cx="2725200" cy="3297600"/>
+          </a:xfrm>
+          <a:prstGeom prst="rect">
+            <a:avLst/>
+          </a:prstGeom>
+          <a:solidFill>
+            <a:schemeClr val="bg1">
+              <a:alpha val="30000"/>
+            </a:schemeClr>
+          </a:solidFill>
+          <a:ln>
+            <a:noFill/>
+          </a:ln>
+        </p:spPr>
+        <p:style>
+          <a:lnRef idx="2">
+            <a:schemeClr val="accent1">
+              <a:shade val="50000"/>
+            </a:schemeClr>
+          </a:lnRef>
+          <a:fillRef idx="1">
+            <a:schemeClr val="accent1"/>
+          </a:fillRef>
+          <a:effectRef idx="0">
+            <a:schemeClr val="accent1"/>
+          </a:effectRef>
+          <a:fontRef idx="minor">
+            <a:schemeClr val="lt1"/>
+          </a:fontRef>
+        </p:style>
+        <p:txBody>
+          <a:bodyPr rtlCol="0" anchor="ctr"/>
+          <a:lstStyle/>
+          <a:p>
+            <a:pPr algn="ctr"/>
+            <a:endParaRPr lang="zh-TW" altLang="en-US"/>
+          </a:p>
+        </p:txBody>
+      </p:sp>
+      <p:sp>
+        <p:nvSpPr>
+          <p:cNvPr id="6" name="文字方塊 5">
+            <a:extLst>
+              <a:ext uri="{FF2B5EF4-FFF2-40B4-BE49-F238E27FC236}">
+                <a16:creationId xmlns:a16="http://schemas.microsoft.com/office/drawing/2014/main" id="{F436194E-B337-49D9-BAAE-6F0BBA69FC4E}"/>
+              </a:ext>
+            </a:extLst>
+          </p:cNvPr>
+          <p:cNvSpPr txBox="1"/>
+          <p:nvPr/>
+        </p:nvSpPr>
+        <p:spPr>
+          <a:xfrm>
+            <a:off x="4742903" y="3013190"/>
+            <a:ext cx="2696665" cy="830997"/>
+          </a:xfrm>
+          <a:prstGeom prst="rect">
+            <a:avLst/>
+          </a:prstGeom>
+          <a:noFill/>
+        </p:spPr>
+        <p:txBody>
+          <a:bodyPr wrap="square" rtlCol="0">
+            <a:spAutoFit/>
+          </a:bodyPr>
+          <a:lstStyle/>
+          <a:p>
+            <a:pPr algn="ctr"/>
+            <a:r>
+              <a:rPr lang="en-US" altLang="zh-TW" sz="4800" b="1" dirty="0">
+                <a:solidFill>
+                  <a:srgbClr val="FFFF00"/>
+                </a:solidFill>
+                <a:latin typeface="微軟正黑體" panose="020B0604030504040204" pitchFamily="34" charset="-120"/>
+                <a:ea typeface="微軟正黑體" panose="020B0604030504040204" pitchFamily="34" charset="-120"/>
+                <a:cs typeface="Arial" panose="020B0604020202020204" pitchFamily="34" charset="0"/>
+              </a:rPr>
+              <a:t>SLB</a:t>
+            </a:r>
+          </a:p>
+        </p:txBody>
+      </p:sp>
+    </p:spTree>
+    <p:extLst>
+      <p:ext uri="{BB962C8B-B14F-4D97-AF65-F5344CB8AC3E}">
+        <p14:creationId xmlns:p14="http://schemas.microsoft.com/office/powerpoint/2010/main" val="3707091687"/>
+      </p:ext>
+    </p:extLst>
+  </p:cSld>
+  <p:clrMapOvr>
+    <a:masterClrMapping/>
+  </p:clrMapOvr>
+</p:sld>
+</file>
+
+<file path=ppt/slides/slide15.xml><?xml version="1.0" encoding="utf-8"?>
+<p:sld xmlns:a="http://schemas.openxmlformats.org/drawingml/2006/main" xmlns:r="http://schemas.openxmlformats.org/officeDocument/2006/relationships" xmlns:p="http://schemas.openxmlformats.org/presentationml/2006/main">
+  <p:cSld>
+    <p:spTree>
+      <p:nvGrpSpPr>
+        <p:cNvPr id="1" name=""/>
+        <p:cNvGrpSpPr/>
+        <p:nvPr/>
+      </p:nvGrpSpPr>
+      <p:grpSpPr>
+        <a:xfrm>
+          <a:off x="0" y="0"/>
+          <a:ext cx="0" cy="0"/>
+          <a:chOff x="0" y="0"/>
+          <a:chExt cx="0" cy="0"/>
+        </a:xfrm>
+      </p:grpSpPr>
+      <p:grpSp>
+        <p:nvGrpSpPr>
+          <p:cNvPr id="3" name="群組 2">
+            <a:extLst>
+              <a:ext uri="{FF2B5EF4-FFF2-40B4-BE49-F238E27FC236}">
+                <a16:creationId xmlns:a16="http://schemas.microsoft.com/office/drawing/2014/main" id="{AB6840BA-E7D1-4368-9BD3-3FCD3855BA06}"/>
+              </a:ext>
+            </a:extLst>
+          </p:cNvPr>
+          <p:cNvGrpSpPr/>
+          <p:nvPr/>
+        </p:nvGrpSpPr>
+        <p:grpSpPr>
+          <a:xfrm>
+            <a:off x="4742903" y="1779889"/>
+            <a:ext cx="2725200" cy="3297600"/>
+            <a:chOff x="4742903" y="1779889"/>
+            <a:chExt cx="2725200" cy="3297600"/>
+          </a:xfrm>
+        </p:grpSpPr>
+        <p:pic>
+          <p:nvPicPr>
+            <p:cNvPr id="5" name="圖片 4">
+              <a:extLst>
+                <a:ext uri="{FF2B5EF4-FFF2-40B4-BE49-F238E27FC236}">
+                  <a16:creationId xmlns:a16="http://schemas.microsoft.com/office/drawing/2014/main" id="{8A400D96-E098-41D2-A91B-9ECA52293B58}"/>
+                </a:ext>
+              </a:extLst>
+            </p:cNvPr>
+            <p:cNvPicPr>
+              <a:picLocks noChangeAspect="1"/>
+            </p:cNvPicPr>
+            <p:nvPr/>
+          </p:nvPicPr>
+          <p:blipFill>
+            <a:blip r:embed="rId2">
+              <a:extLst>
+                <a:ext uri="{28A0092B-C50C-407E-A947-70E740481C1C}">
+                  <a14:useLocalDpi xmlns:a14="http://schemas.microsoft.com/office/drawing/2010/main" val="0"/>
+                </a:ext>
+              </a:extLst>
+            </a:blip>
+            <a:stretch>
+              <a:fillRect/>
+            </a:stretch>
+          </p:blipFill>
+          <p:spPr>
+            <a:xfrm>
+              <a:off x="4747667" y="1785273"/>
+              <a:ext cx="2696665" cy="3287454"/>
+            </a:xfrm>
+            <a:prstGeom prst="rect">
+              <a:avLst/>
+            </a:prstGeom>
+          </p:spPr>
+        </p:pic>
+        <p:sp>
+          <p:nvSpPr>
+            <p:cNvPr id="2" name="矩形 1">
+              <a:extLst>
+                <a:ext uri="{FF2B5EF4-FFF2-40B4-BE49-F238E27FC236}">
+                  <a16:creationId xmlns:a16="http://schemas.microsoft.com/office/drawing/2014/main" id="{9B4AEE40-7564-9AB1-070F-7148E319AEC7}"/>
+                </a:ext>
+              </a:extLst>
+            </p:cNvPr>
+            <p:cNvSpPr/>
+            <p:nvPr/>
+          </p:nvSpPr>
+          <p:spPr>
+            <a:xfrm>
+              <a:off x="4742903" y="1779889"/>
+              <a:ext cx="2725200" cy="3297600"/>
+            </a:xfrm>
+            <a:prstGeom prst="rect">
+              <a:avLst/>
+            </a:prstGeom>
+            <a:solidFill>
+              <a:schemeClr val="bg1">
+                <a:alpha val="30000"/>
+              </a:schemeClr>
+            </a:solidFill>
+            <a:ln>
+              <a:noFill/>
+            </a:ln>
+          </p:spPr>
+          <p:style>
+            <a:lnRef idx="2">
+              <a:schemeClr val="accent1">
+                <a:shade val="50000"/>
+              </a:schemeClr>
+            </a:lnRef>
+            <a:fillRef idx="1">
+              <a:schemeClr val="accent1"/>
+            </a:fillRef>
+            <a:effectRef idx="0">
+              <a:schemeClr val="accent1"/>
+            </a:effectRef>
+            <a:fontRef idx="minor">
+              <a:schemeClr val="lt1"/>
+            </a:fontRef>
+          </p:style>
+          <p:txBody>
+            <a:bodyPr rtlCol="0" anchor="ctr"/>
+            <a:lstStyle/>
+            <a:p>
+              <a:pPr algn="ctr"/>
+              <a:endParaRPr lang="zh-TW" altLang="en-US"/>
+            </a:p>
+          </p:txBody>
+        </p:sp>
+        <p:sp>
+          <p:nvSpPr>
+            <p:cNvPr id="6" name="文字方塊 5">
+              <a:extLst>
+                <a:ext uri="{FF2B5EF4-FFF2-40B4-BE49-F238E27FC236}">
+                  <a16:creationId xmlns:a16="http://schemas.microsoft.com/office/drawing/2014/main" id="{F436194E-B337-49D9-BAAE-6F0BBA69FC4E}"/>
+                </a:ext>
+              </a:extLst>
+            </p:cNvPr>
+            <p:cNvSpPr txBox="1"/>
+            <p:nvPr/>
+          </p:nvSpPr>
+          <p:spPr>
+            <a:xfrm>
+              <a:off x="4747666" y="2797747"/>
+              <a:ext cx="2696665" cy="1261884"/>
+            </a:xfrm>
+            <a:prstGeom prst="rect">
+              <a:avLst/>
+            </a:prstGeom>
+            <a:noFill/>
+          </p:spPr>
+          <p:txBody>
+            <a:bodyPr wrap="square" rtlCol="0">
+              <a:spAutoFit/>
+            </a:bodyPr>
+            <a:lstStyle/>
+            <a:p>
+              <a:pPr algn="ctr"/>
+              <a:r>
+                <a:rPr lang="zh-TW" altLang="en-US" sz="3800" b="1" dirty="0">
+                  <a:solidFill>
+                    <a:srgbClr val="FFFF00"/>
+                  </a:solidFill>
+                  <a:latin typeface="微軟正黑體" panose="020B0604030504040204" pitchFamily="34" charset="-120"/>
+                  <a:ea typeface="微軟正黑體" panose="020B0604030504040204" pitchFamily="34" charset="-120"/>
+                  <a:cs typeface="Arial" panose="020B0604020202020204" pitchFamily="34" charset="0"/>
+                </a:rPr>
+                <a:t>櫃買</a:t>
+              </a:r>
+              <a:endParaRPr lang="en-US" altLang="zh-TW" sz="3800" b="1" dirty="0">
+                <a:solidFill>
+                  <a:srgbClr val="FFFF00"/>
+                </a:solidFill>
+                <a:latin typeface="微軟正黑體" panose="020B0604030504040204" pitchFamily="34" charset="-120"/>
+                <a:ea typeface="微軟正黑體" panose="020B0604030504040204" pitchFamily="34" charset="-120"/>
+                <a:cs typeface="Arial" panose="020B0604020202020204" pitchFamily="34" charset="0"/>
+              </a:endParaRPr>
+            </a:p>
+            <a:p>
+              <a:pPr algn="ctr"/>
+              <a:r>
+                <a:rPr lang="zh-TW" altLang="en-US" sz="3800" b="1" dirty="0">
+                  <a:solidFill>
+                    <a:srgbClr val="FFFF00"/>
+                  </a:solidFill>
+                  <a:latin typeface="微軟正黑體" panose="020B0604030504040204" pitchFamily="34" charset="-120"/>
+                  <a:ea typeface="微軟正黑體" panose="020B0604030504040204" pitchFamily="34" charset="-120"/>
+                  <a:cs typeface="Arial" panose="020B0604020202020204" pitchFamily="34" charset="0"/>
+                </a:rPr>
+                <a:t>中心</a:t>
+              </a:r>
+              <a:endParaRPr lang="en-US" altLang="zh-TW" sz="3800" b="1" dirty="0">
+                <a:solidFill>
+                  <a:srgbClr val="FFFF00"/>
+                </a:solidFill>
+                <a:latin typeface="微軟正黑體" panose="020B0604030504040204" pitchFamily="34" charset="-120"/>
+                <a:ea typeface="微軟正黑體" panose="020B0604030504040204" pitchFamily="34" charset="-120"/>
+                <a:cs typeface="Arial" panose="020B0604020202020204" pitchFamily="34" charset="0"/>
+              </a:endParaRPr>
+            </a:p>
+          </p:txBody>
+        </p:sp>
+      </p:grpSp>
+    </p:spTree>
+    <p:extLst>
+      <p:ext uri="{BB962C8B-B14F-4D97-AF65-F5344CB8AC3E}">
+        <p14:creationId xmlns:p14="http://schemas.microsoft.com/office/powerpoint/2010/main" val="4031842708"/>
+      </p:ext>
+    </p:extLst>
+  </p:cSld>
+  <p:clrMapOvr>
+    <a:masterClrMapping/>
+  </p:clrMapOvr>
+</p:sld>
+</file>
+
+<file path=ppt/slides/slide16.xml><?xml version="1.0" encoding="utf-8"?>
+<p:sld xmlns:a="http://schemas.openxmlformats.org/drawingml/2006/main" xmlns:r="http://schemas.openxmlformats.org/officeDocument/2006/relationships" xmlns:p="http://schemas.openxmlformats.org/presentationml/2006/main">
+  <p:cSld>
+    <p:spTree>
+      <p:nvGrpSpPr>
+        <p:cNvPr id="1" name=""/>
+        <p:cNvGrpSpPr/>
+        <p:nvPr/>
+      </p:nvGrpSpPr>
+      <p:grpSpPr>
+        <a:xfrm>
+          <a:off x="0" y="0"/>
+          <a:ext cx="0" cy="0"/>
+          <a:chOff x="0" y="0"/>
+          <a:chExt cx="0" cy="0"/>
+        </a:xfrm>
+      </p:grpSpPr>
+      <p:pic>
+        <p:nvPicPr>
+          <p:cNvPr id="5" name="圖片 4">
+            <a:extLst>
+              <a:ext uri="{FF2B5EF4-FFF2-40B4-BE49-F238E27FC236}">
+                <a16:creationId xmlns:a16="http://schemas.microsoft.com/office/drawing/2014/main" id="{8A400D96-E098-41D2-A91B-9ECA52293B58}"/>
+              </a:ext>
+            </a:extLst>
+          </p:cNvPr>
+          <p:cNvPicPr>
+            <a:picLocks noChangeAspect="1"/>
+          </p:cNvPicPr>
+          <p:nvPr/>
+        </p:nvPicPr>
+        <p:blipFill>
+          <a:blip r:embed="rId2">
+            <a:extLst>
+              <a:ext uri="{28A0092B-C50C-407E-A947-70E740481C1C}">
+                <a14:useLocalDpi xmlns:a14="http://schemas.microsoft.com/office/drawing/2010/main" val="0"/>
+              </a:ext>
+            </a:extLst>
+          </a:blip>
+          <a:stretch>
+            <a:fillRect/>
+          </a:stretch>
+        </p:blipFill>
+        <p:spPr>
+          <a:xfrm>
+            <a:off x="4747667" y="1785273"/>
+            <a:ext cx="2696665" cy="3287454"/>
+          </a:xfrm>
+          <a:prstGeom prst="rect">
+            <a:avLst/>
+          </a:prstGeom>
+        </p:spPr>
+      </p:pic>
+      <p:sp>
+        <p:nvSpPr>
+          <p:cNvPr id="2" name="矩形 1">
+            <a:extLst>
+              <a:ext uri="{FF2B5EF4-FFF2-40B4-BE49-F238E27FC236}">
+                <a16:creationId xmlns:a16="http://schemas.microsoft.com/office/drawing/2014/main" id="{9B4AEE40-7564-9AB1-070F-7148E319AEC7}"/>
+              </a:ext>
+            </a:extLst>
+          </p:cNvPr>
+          <p:cNvSpPr/>
+          <p:nvPr/>
+        </p:nvSpPr>
+        <p:spPr>
+          <a:xfrm>
+            <a:off x="4742903" y="1779889"/>
+            <a:ext cx="2725200" cy="3297600"/>
+          </a:xfrm>
+          <a:prstGeom prst="rect">
+            <a:avLst/>
+          </a:prstGeom>
+          <a:solidFill>
+            <a:schemeClr val="bg1">
+              <a:alpha val="30000"/>
+            </a:schemeClr>
+          </a:solidFill>
+          <a:ln>
+            <a:noFill/>
+          </a:ln>
+        </p:spPr>
+        <p:style>
+          <a:lnRef idx="2">
+            <a:schemeClr val="accent1">
+              <a:shade val="50000"/>
+            </a:schemeClr>
+          </a:lnRef>
+          <a:fillRef idx="1">
+            <a:schemeClr val="accent1"/>
+          </a:fillRef>
+          <a:effectRef idx="0">
+            <a:schemeClr val="accent1"/>
+          </a:effectRef>
+          <a:fontRef idx="minor">
+            <a:schemeClr val="lt1"/>
+          </a:fontRef>
+        </p:style>
+        <p:txBody>
+          <a:bodyPr rtlCol="0" anchor="ctr"/>
+          <a:lstStyle/>
+          <a:p>
+            <a:pPr algn="ctr"/>
+            <a:endParaRPr lang="zh-TW" altLang="en-US"/>
+          </a:p>
+        </p:txBody>
+      </p:sp>
+      <p:sp>
+        <p:nvSpPr>
+          <p:cNvPr id="6" name="文字方塊 5">
+            <a:extLst>
+              <a:ext uri="{FF2B5EF4-FFF2-40B4-BE49-F238E27FC236}">
+                <a16:creationId xmlns:a16="http://schemas.microsoft.com/office/drawing/2014/main" id="{F436194E-B337-49D9-BAAE-6F0BBA69FC4E}"/>
+              </a:ext>
+            </a:extLst>
+          </p:cNvPr>
+          <p:cNvSpPr txBox="1"/>
+          <p:nvPr/>
+        </p:nvSpPr>
+        <p:spPr>
+          <a:xfrm>
+            <a:off x="4747666" y="2212971"/>
+            <a:ext cx="2696665" cy="2431435"/>
+          </a:xfrm>
+          <a:prstGeom prst="rect">
+            <a:avLst/>
+          </a:prstGeom>
+          <a:noFill/>
+        </p:spPr>
+        <p:txBody>
+          <a:bodyPr wrap="square" rtlCol="0">
+            <a:spAutoFit/>
+          </a:bodyPr>
+          <a:lstStyle/>
+          <a:p>
+            <a:pPr algn="ctr"/>
+            <a:r>
+              <a:rPr lang="en-US" altLang="zh-TW" sz="3800" b="1" dirty="0">
+                <a:solidFill>
+                  <a:srgbClr val="FFFF00"/>
+                </a:solidFill>
+                <a:latin typeface="微軟正黑體" panose="020B0604030504040204" pitchFamily="34" charset="-120"/>
+                <a:ea typeface="微軟正黑體" panose="020B0604030504040204" pitchFamily="34" charset="-120"/>
+                <a:cs typeface="Arial" panose="020B0604020202020204" pitchFamily="34" charset="0"/>
+              </a:rPr>
+              <a:t>TPEX</a:t>
+            </a:r>
+          </a:p>
+          <a:p>
+            <a:pPr algn="ctr"/>
+            <a:r>
+              <a:rPr lang="en-US" altLang="zh-TW" sz="3800" b="1" dirty="0">
+                <a:solidFill>
+                  <a:srgbClr val="FFFF00"/>
+                </a:solidFill>
+                <a:latin typeface="微軟正黑體" panose="020B0604030504040204" pitchFamily="34" charset="-120"/>
+                <a:ea typeface="微軟正黑體" panose="020B0604030504040204" pitchFamily="34" charset="-120"/>
+                <a:cs typeface="Arial" panose="020B0604020202020204" pitchFamily="34" charset="0"/>
+              </a:rPr>
+              <a:t>FactSet</a:t>
+            </a:r>
+          </a:p>
+          <a:p>
+            <a:pPr algn="ctr"/>
+            <a:r>
+              <a:rPr lang="zh-TW" altLang="en-US" sz="3800" b="1" dirty="0">
+                <a:solidFill>
+                  <a:srgbClr val="FFFF00"/>
+                </a:solidFill>
+                <a:latin typeface="微軟正黑體" panose="020B0604030504040204" pitchFamily="34" charset="-120"/>
+                <a:ea typeface="微軟正黑體" panose="020B0604030504040204" pitchFamily="34" charset="-120"/>
+                <a:cs typeface="Arial" panose="020B0604020202020204" pitchFamily="34" charset="0"/>
+              </a:rPr>
+              <a:t>氣候韌性</a:t>
+            </a:r>
+            <a:endParaRPr lang="en-US" altLang="zh-TW" sz="3800" b="1" dirty="0">
+              <a:solidFill>
+                <a:srgbClr val="FFFF00"/>
+              </a:solidFill>
+              <a:latin typeface="微軟正黑體" panose="020B0604030504040204" pitchFamily="34" charset="-120"/>
+              <a:ea typeface="微軟正黑體" panose="020B0604030504040204" pitchFamily="34" charset="-120"/>
+              <a:cs typeface="Arial" panose="020B0604020202020204" pitchFamily="34" charset="0"/>
+            </a:endParaRPr>
+          </a:p>
+          <a:p>
+            <a:pPr algn="ctr"/>
+            <a:r>
+              <a:rPr lang="zh-TW" altLang="en-US" sz="3800" b="1" dirty="0">
+                <a:solidFill>
+                  <a:srgbClr val="FFFF00"/>
+                </a:solidFill>
+                <a:latin typeface="微軟正黑體" panose="020B0604030504040204" pitchFamily="34" charset="-120"/>
+                <a:ea typeface="微軟正黑體" panose="020B0604030504040204" pitchFamily="34" charset="-120"/>
+                <a:cs typeface="Arial" panose="020B0604020202020204" pitchFamily="34" charset="0"/>
+              </a:rPr>
+              <a:t>指數系列</a:t>
+            </a:r>
+            <a:endParaRPr lang="en-US" altLang="zh-TW" sz="3800" b="1" dirty="0">
+              <a:solidFill>
+                <a:srgbClr val="FFFF00"/>
+              </a:solidFill>
+              <a:latin typeface="微軟正黑體" panose="020B0604030504040204" pitchFamily="34" charset="-120"/>
+              <a:ea typeface="微軟正黑體" panose="020B0604030504040204" pitchFamily="34" charset="-120"/>
+              <a:cs typeface="Arial" panose="020B0604020202020204" pitchFamily="34" charset="0"/>
+            </a:endParaRPr>
+          </a:p>
+        </p:txBody>
+      </p:sp>
+    </p:spTree>
+    <p:extLst>
+      <p:ext uri="{BB962C8B-B14F-4D97-AF65-F5344CB8AC3E}">
+        <p14:creationId xmlns:p14="http://schemas.microsoft.com/office/powerpoint/2010/main" val="3795424615"/>
+      </p:ext>
+    </p:extLst>
+  </p:cSld>
+  <p:clrMapOvr>
+    <a:masterClrMapping/>
+  </p:clrMapOvr>
+</p:sld>
+</file>
+
+<file path=ppt/slides/slide17.xml><?xml version="1.0" encoding="utf-8"?>
+<p:sld xmlns:a="http://schemas.openxmlformats.org/drawingml/2006/main" xmlns:r="http://schemas.openxmlformats.org/officeDocument/2006/relationships" xmlns:p="http://schemas.openxmlformats.org/presentationml/2006/main">
+  <p:cSld>
+    <p:spTree>
+      <p:nvGrpSpPr>
+        <p:cNvPr id="1" name=""/>
+        <p:cNvGrpSpPr/>
+        <p:nvPr/>
+      </p:nvGrpSpPr>
+      <p:grpSpPr>
+        <a:xfrm>
+          <a:off x="0" y="0"/>
+          <a:ext cx="0" cy="0"/>
+          <a:chOff x="0" y="0"/>
+          <a:chExt cx="0" cy="0"/>
+        </a:xfrm>
+      </p:grpSpPr>
+      <p:pic>
+        <p:nvPicPr>
+          <p:cNvPr id="5" name="圖片 4">
+            <a:extLst>
+              <a:ext uri="{FF2B5EF4-FFF2-40B4-BE49-F238E27FC236}">
+                <a16:creationId xmlns:a16="http://schemas.microsoft.com/office/drawing/2014/main" id="{8A400D96-E098-41D2-A91B-9ECA52293B58}"/>
+              </a:ext>
+            </a:extLst>
+          </p:cNvPr>
+          <p:cNvPicPr>
+            <a:picLocks noChangeAspect="1"/>
+          </p:cNvPicPr>
+          <p:nvPr/>
+        </p:nvPicPr>
+        <p:blipFill>
+          <a:blip r:embed="rId2">
+            <a:extLst>
+              <a:ext uri="{28A0092B-C50C-407E-A947-70E740481C1C}">
+                <a14:useLocalDpi xmlns:a14="http://schemas.microsoft.com/office/drawing/2010/main" val="0"/>
+              </a:ext>
+            </a:extLst>
+          </a:blip>
+          <a:stretch>
+            <a:fillRect/>
+          </a:stretch>
+        </p:blipFill>
+        <p:spPr>
+          <a:xfrm>
+            <a:off x="4747667" y="1785273"/>
+            <a:ext cx="2696665" cy="3287454"/>
+          </a:xfrm>
+          <a:prstGeom prst="rect">
+            <a:avLst/>
+          </a:prstGeom>
+        </p:spPr>
+      </p:pic>
+      <p:sp>
+        <p:nvSpPr>
+          <p:cNvPr id="2" name="矩形 1">
+            <a:extLst>
+              <a:ext uri="{FF2B5EF4-FFF2-40B4-BE49-F238E27FC236}">
+                <a16:creationId xmlns:a16="http://schemas.microsoft.com/office/drawing/2014/main" id="{9B4AEE40-7564-9AB1-070F-7148E319AEC7}"/>
+              </a:ext>
+            </a:extLst>
+          </p:cNvPr>
+          <p:cNvSpPr/>
+          <p:nvPr/>
+        </p:nvSpPr>
+        <p:spPr>
+          <a:xfrm>
+            <a:off x="4742903" y="1779889"/>
+            <a:ext cx="2725200" cy="3297600"/>
+          </a:xfrm>
+          <a:prstGeom prst="rect">
+            <a:avLst/>
+          </a:prstGeom>
+          <a:solidFill>
+            <a:schemeClr val="bg1">
+              <a:alpha val="30000"/>
+            </a:schemeClr>
+          </a:solidFill>
+          <a:ln>
+            <a:noFill/>
+          </a:ln>
+        </p:spPr>
+        <p:style>
+          <a:lnRef idx="2">
+            <a:schemeClr val="accent1">
+              <a:shade val="50000"/>
+            </a:schemeClr>
+          </a:lnRef>
+          <a:fillRef idx="1">
+            <a:schemeClr val="accent1"/>
+          </a:fillRef>
+          <a:effectRef idx="0">
+            <a:schemeClr val="accent1"/>
+          </a:effectRef>
+          <a:fontRef idx="minor">
+            <a:schemeClr val="lt1"/>
+          </a:fontRef>
+        </p:style>
+        <p:txBody>
+          <a:bodyPr rtlCol="0" anchor="ctr"/>
+          <a:lstStyle/>
+          <a:p>
+            <a:pPr algn="ctr"/>
+            <a:endParaRPr lang="zh-TW" altLang="en-US"/>
+          </a:p>
+        </p:txBody>
+      </p:sp>
+      <p:sp>
+        <p:nvSpPr>
+          <p:cNvPr id="6" name="文字方塊 5">
+            <a:extLst>
+              <a:ext uri="{FF2B5EF4-FFF2-40B4-BE49-F238E27FC236}">
+                <a16:creationId xmlns:a16="http://schemas.microsoft.com/office/drawing/2014/main" id="{F436194E-B337-49D9-BAAE-6F0BBA69FC4E}"/>
+              </a:ext>
+            </a:extLst>
+          </p:cNvPr>
+          <p:cNvSpPr txBox="1"/>
+          <p:nvPr/>
+        </p:nvSpPr>
+        <p:spPr>
+          <a:xfrm>
+            <a:off x="4742903" y="2505359"/>
+            <a:ext cx="2696665" cy="1846659"/>
+          </a:xfrm>
+          <a:prstGeom prst="rect">
+            <a:avLst/>
+          </a:prstGeom>
+          <a:noFill/>
+        </p:spPr>
+        <p:txBody>
+          <a:bodyPr wrap="square" rtlCol="0">
+            <a:spAutoFit/>
+          </a:bodyPr>
+          <a:lstStyle/>
+          <a:p>
+            <a:pPr algn="ctr"/>
+            <a:r>
+              <a:rPr lang="zh-TW" altLang="en-US" sz="3800" b="1" dirty="0">
+                <a:solidFill>
+                  <a:srgbClr val="FFFF00"/>
+                </a:solidFill>
+                <a:latin typeface="微軟正黑體" panose="020B0604030504040204" pitchFamily="34" charset="-120"/>
+                <a:ea typeface="微軟正黑體" panose="020B0604030504040204" pitchFamily="34" charset="-120"/>
+                <a:cs typeface="Arial" panose="020B0604020202020204" pitchFamily="34" charset="0"/>
+              </a:rPr>
+              <a:t>櫃買中心</a:t>
+            </a:r>
+            <a:endParaRPr lang="en-US" altLang="zh-TW" sz="3800" b="1" dirty="0">
+              <a:solidFill>
+                <a:srgbClr val="FFFF00"/>
+              </a:solidFill>
+              <a:latin typeface="微軟正黑體" panose="020B0604030504040204" pitchFamily="34" charset="-120"/>
+              <a:ea typeface="微軟正黑體" panose="020B0604030504040204" pitchFamily="34" charset="-120"/>
+              <a:cs typeface="Arial" panose="020B0604020202020204" pitchFamily="34" charset="0"/>
+            </a:endParaRPr>
+          </a:p>
+          <a:p>
+            <a:pPr algn="ctr"/>
+            <a:r>
+              <a:rPr lang="zh-TW" altLang="en-US" sz="3800" b="1" dirty="0">
+                <a:solidFill>
+                  <a:srgbClr val="FFFF00"/>
+                </a:solidFill>
+                <a:latin typeface="微軟正黑體" panose="020B0604030504040204" pitchFamily="34" charset="-120"/>
+                <a:ea typeface="微軟正黑體" panose="020B0604030504040204" pitchFamily="34" charset="-120"/>
+                <a:cs typeface="Arial" panose="020B0604020202020204" pitchFamily="34" charset="0"/>
+              </a:rPr>
+              <a:t>及</a:t>
+            </a:r>
+            <a:endParaRPr lang="en-US" altLang="zh-TW" sz="3800" b="1" dirty="0">
+              <a:solidFill>
+                <a:srgbClr val="FFFF00"/>
+              </a:solidFill>
+              <a:latin typeface="微軟正黑體" panose="020B0604030504040204" pitchFamily="34" charset="-120"/>
+              <a:ea typeface="微軟正黑體" panose="020B0604030504040204" pitchFamily="34" charset="-120"/>
+              <a:cs typeface="Arial" panose="020B0604020202020204" pitchFamily="34" charset="0"/>
+            </a:endParaRPr>
+          </a:p>
+          <a:p>
+            <a:pPr algn="ctr"/>
+            <a:r>
+              <a:rPr lang="en-US" altLang="zh-TW" sz="3800" b="1" dirty="0">
+                <a:solidFill>
+                  <a:srgbClr val="FFFF00"/>
+                </a:solidFill>
+                <a:latin typeface="微軟正黑體" panose="020B0604030504040204" pitchFamily="34" charset="-120"/>
+                <a:ea typeface="微軟正黑體" panose="020B0604030504040204" pitchFamily="34" charset="-120"/>
+                <a:cs typeface="Arial" panose="020B0604020202020204" pitchFamily="34" charset="0"/>
+              </a:rPr>
+              <a:t>FactSet</a:t>
+            </a:r>
+          </a:p>
+        </p:txBody>
+      </p:sp>
+    </p:spTree>
+    <p:extLst>
+      <p:ext uri="{BB962C8B-B14F-4D97-AF65-F5344CB8AC3E}">
+        <p14:creationId xmlns:p14="http://schemas.microsoft.com/office/powerpoint/2010/main" val="3698213942"/>
+      </p:ext>
+    </p:extLst>
+  </p:cSld>
+  <p:clrMapOvr>
+    <a:masterClrMapping/>
+  </p:clrMapOvr>
+</p:sld>
+</file>
+
+<file path=ppt/slides/slide18.xml><?xml version="1.0" encoding="utf-8"?>
+<p:sld xmlns:a="http://schemas.openxmlformats.org/drawingml/2006/main" xmlns:r="http://schemas.openxmlformats.org/officeDocument/2006/relationships" xmlns:p="http://schemas.openxmlformats.org/presentationml/2006/main">
+  <p:cSld>
+    <p:spTree>
+      <p:nvGrpSpPr>
+        <p:cNvPr id="1" name=""/>
+        <p:cNvGrpSpPr/>
+        <p:nvPr/>
+      </p:nvGrpSpPr>
+      <p:grpSpPr>
+        <a:xfrm>
+          <a:off x="0" y="0"/>
+          <a:ext cx="0" cy="0"/>
+          <a:chOff x="0" y="0"/>
+          <a:chExt cx="0" cy="0"/>
+        </a:xfrm>
+      </p:grpSpPr>
+      <p:pic>
+        <p:nvPicPr>
+          <p:cNvPr id="5" name="圖片 4">
+            <a:extLst>
+              <a:ext uri="{FF2B5EF4-FFF2-40B4-BE49-F238E27FC236}">
+                <a16:creationId xmlns:a16="http://schemas.microsoft.com/office/drawing/2014/main" id="{8A400D96-E098-41D2-A91B-9ECA52293B58}"/>
+              </a:ext>
+            </a:extLst>
+          </p:cNvPr>
+          <p:cNvPicPr>
+            <a:picLocks noChangeAspect="1"/>
+          </p:cNvPicPr>
+          <p:nvPr/>
+        </p:nvPicPr>
+        <p:blipFill>
+          <a:blip r:embed="rId2">
+            <a:extLst>
+              <a:ext uri="{28A0092B-C50C-407E-A947-70E740481C1C}">
+                <a14:useLocalDpi xmlns:a14="http://schemas.microsoft.com/office/drawing/2010/main" val="0"/>
+              </a:ext>
+            </a:extLst>
+          </a:blip>
+          <a:stretch>
+            <a:fillRect/>
+          </a:stretch>
+        </p:blipFill>
+        <p:spPr>
+          <a:xfrm>
+            <a:off x="4747667" y="1785273"/>
+            <a:ext cx="2696665" cy="3287454"/>
+          </a:xfrm>
+          <a:prstGeom prst="rect">
+            <a:avLst/>
+          </a:prstGeom>
+        </p:spPr>
+      </p:pic>
+      <p:sp>
+        <p:nvSpPr>
+          <p:cNvPr id="2" name="矩形 1">
+            <a:extLst>
+              <a:ext uri="{FF2B5EF4-FFF2-40B4-BE49-F238E27FC236}">
+                <a16:creationId xmlns:a16="http://schemas.microsoft.com/office/drawing/2014/main" id="{9B4AEE40-7564-9AB1-070F-7148E319AEC7}"/>
+              </a:ext>
+            </a:extLst>
+          </p:cNvPr>
+          <p:cNvSpPr/>
+          <p:nvPr/>
+        </p:nvSpPr>
+        <p:spPr>
+          <a:xfrm>
+            <a:off x="4742903" y="1779889"/>
+            <a:ext cx="2725200" cy="3297600"/>
+          </a:xfrm>
+          <a:prstGeom prst="rect">
+            <a:avLst/>
+          </a:prstGeom>
+          <a:solidFill>
+            <a:schemeClr val="bg1">
+              <a:alpha val="30000"/>
+            </a:schemeClr>
+          </a:solidFill>
+          <a:ln>
+            <a:noFill/>
+          </a:ln>
+        </p:spPr>
+        <p:style>
+          <a:lnRef idx="2">
+            <a:schemeClr val="accent1">
+              <a:shade val="50000"/>
+            </a:schemeClr>
+          </a:lnRef>
+          <a:fillRef idx="1">
+            <a:schemeClr val="accent1"/>
+          </a:fillRef>
+          <a:effectRef idx="0">
+            <a:schemeClr val="accent1"/>
+          </a:effectRef>
+          <a:fontRef idx="minor">
+            <a:schemeClr val="lt1"/>
+          </a:fontRef>
+        </p:style>
+        <p:txBody>
+          <a:bodyPr rtlCol="0" anchor="ctr"/>
+          <a:lstStyle/>
+          <a:p>
+            <a:pPr algn="ctr"/>
+            <a:endParaRPr lang="zh-TW" altLang="en-US"/>
+          </a:p>
+        </p:txBody>
+      </p:sp>
+      <p:sp>
+        <p:nvSpPr>
+          <p:cNvPr id="6" name="文字方塊 5">
+            <a:extLst>
+              <a:ext uri="{FF2B5EF4-FFF2-40B4-BE49-F238E27FC236}">
+                <a16:creationId xmlns:a16="http://schemas.microsoft.com/office/drawing/2014/main" id="{F436194E-B337-49D9-BAAE-6F0BBA69FC4E}"/>
+              </a:ext>
+            </a:extLst>
+          </p:cNvPr>
+          <p:cNvSpPr txBox="1"/>
+          <p:nvPr/>
+        </p:nvSpPr>
+        <p:spPr>
+          <a:xfrm>
+            <a:off x="4757170" y="2766969"/>
+            <a:ext cx="2696665" cy="1323439"/>
+          </a:xfrm>
+          <a:prstGeom prst="rect">
+            <a:avLst/>
+          </a:prstGeom>
+          <a:noFill/>
+        </p:spPr>
+        <p:txBody>
+          <a:bodyPr wrap="square" rtlCol="0">
+            <a:spAutoFit/>
+          </a:bodyPr>
+          <a:lstStyle/>
+          <a:p>
+            <a:pPr algn="ctr"/>
+            <a:r>
+              <a:rPr lang="en-US" altLang="zh-TW" sz="8000" b="1" dirty="0">
+                <a:solidFill>
+                  <a:srgbClr val="FFFF00"/>
+                </a:solidFill>
+                <a:latin typeface="微軟正黑體" panose="020B0604030504040204" pitchFamily="34" charset="-120"/>
+                <a:ea typeface="微軟正黑體" panose="020B0604030504040204" pitchFamily="34" charset="-120"/>
+                <a:cs typeface="Arial" panose="020B0604020202020204" pitchFamily="34" charset="0"/>
+              </a:rPr>
+              <a:t>3</a:t>
+            </a:r>
+          </a:p>
+        </p:txBody>
+      </p:sp>
+    </p:spTree>
+    <p:extLst>
+      <p:ext uri="{BB962C8B-B14F-4D97-AF65-F5344CB8AC3E}">
+        <p14:creationId xmlns:p14="http://schemas.microsoft.com/office/powerpoint/2010/main" val="1319675256"/>
+      </p:ext>
+    </p:extLst>
+  </p:cSld>
+  <p:clrMapOvr>
+    <a:masterClrMapping/>
+  </p:clrMapOvr>
+</p:sld>
+</file>
+
+<file path=ppt/slides/slide19.xml><?xml version="1.0" encoding="utf-8"?>
+<p:sld xmlns:a="http://schemas.openxmlformats.org/drawingml/2006/main" xmlns:r="http://schemas.openxmlformats.org/officeDocument/2006/relationships" xmlns:p="http://schemas.openxmlformats.org/presentationml/2006/main">
+  <p:cSld>
+    <p:spTree>
+      <p:nvGrpSpPr>
+        <p:cNvPr id="1" name=""/>
+        <p:cNvGrpSpPr/>
+        <p:nvPr/>
+      </p:nvGrpSpPr>
+      <p:grpSpPr>
+        <a:xfrm>
+          <a:off x="0" y="0"/>
+          <a:ext cx="0" cy="0"/>
+          <a:chOff x="0" y="0"/>
+          <a:chExt cx="0" cy="0"/>
+        </a:xfrm>
+      </p:grpSpPr>
+      <p:pic>
+        <p:nvPicPr>
+          <p:cNvPr id="5" name="圖片 4">
+            <a:extLst>
+              <a:ext uri="{FF2B5EF4-FFF2-40B4-BE49-F238E27FC236}">
+                <a16:creationId xmlns:a16="http://schemas.microsoft.com/office/drawing/2014/main" id="{8A400D96-E098-41D2-A91B-9ECA52293B58}"/>
+              </a:ext>
+            </a:extLst>
+          </p:cNvPr>
+          <p:cNvPicPr>
+            <a:picLocks noChangeAspect="1"/>
+          </p:cNvPicPr>
+          <p:nvPr/>
+        </p:nvPicPr>
+        <p:blipFill>
+          <a:blip r:embed="rId2">
+            <a:extLst>
+              <a:ext uri="{28A0092B-C50C-407E-A947-70E740481C1C}">
+                <a14:useLocalDpi xmlns:a14="http://schemas.microsoft.com/office/drawing/2010/main" val="0"/>
+              </a:ext>
+            </a:extLst>
+          </a:blip>
+          <a:stretch>
+            <a:fillRect/>
+          </a:stretch>
+        </p:blipFill>
+        <p:spPr>
+          <a:xfrm>
+            <a:off x="4747667" y="1785273"/>
+            <a:ext cx="2696665" cy="3287454"/>
+          </a:xfrm>
+          <a:prstGeom prst="rect">
+            <a:avLst/>
+          </a:prstGeom>
+        </p:spPr>
+      </p:pic>
+      <p:sp>
+        <p:nvSpPr>
+          <p:cNvPr id="2" name="矩形 1">
+            <a:extLst>
+              <a:ext uri="{FF2B5EF4-FFF2-40B4-BE49-F238E27FC236}">
+                <a16:creationId xmlns:a16="http://schemas.microsoft.com/office/drawing/2014/main" id="{9B4AEE40-7564-9AB1-070F-7148E319AEC7}"/>
+              </a:ext>
+            </a:extLst>
+          </p:cNvPr>
+          <p:cNvSpPr/>
+          <p:nvPr/>
+        </p:nvSpPr>
+        <p:spPr>
+          <a:xfrm>
+            <a:off x="4742903" y="1779889"/>
+            <a:ext cx="2725200" cy="3297600"/>
+          </a:xfrm>
+          <a:prstGeom prst="rect">
+            <a:avLst/>
+          </a:prstGeom>
+          <a:solidFill>
+            <a:schemeClr val="bg1">
+              <a:alpha val="30000"/>
+            </a:schemeClr>
+          </a:solidFill>
+          <a:ln>
+            <a:noFill/>
+          </a:ln>
+        </p:spPr>
+        <p:style>
+          <a:lnRef idx="2">
+            <a:schemeClr val="accent1">
+              <a:shade val="50000"/>
+            </a:schemeClr>
+          </a:lnRef>
+          <a:fillRef idx="1">
+            <a:schemeClr val="accent1"/>
+          </a:fillRef>
+          <a:effectRef idx="0">
+            <a:schemeClr val="accent1"/>
+          </a:effectRef>
+          <a:fontRef idx="minor">
+            <a:schemeClr val="lt1"/>
+          </a:fontRef>
+        </p:style>
+        <p:txBody>
+          <a:bodyPr rtlCol="0" anchor="ctr"/>
+          <a:lstStyle/>
+          <a:p>
+            <a:pPr algn="ctr"/>
+            <a:endParaRPr lang="zh-TW" altLang="en-US"/>
+          </a:p>
+        </p:txBody>
+      </p:sp>
+      <p:sp>
+        <p:nvSpPr>
+          <p:cNvPr id="6" name="文字方塊 5">
+            <a:extLst>
+              <a:ext uri="{FF2B5EF4-FFF2-40B4-BE49-F238E27FC236}">
+                <a16:creationId xmlns:a16="http://schemas.microsoft.com/office/drawing/2014/main" id="{F436194E-B337-49D9-BAAE-6F0BBA69FC4E}"/>
+              </a:ext>
+            </a:extLst>
+          </p:cNvPr>
+          <p:cNvSpPr txBox="1"/>
+          <p:nvPr/>
+        </p:nvSpPr>
+        <p:spPr>
+          <a:xfrm>
+            <a:off x="4757170" y="2505359"/>
+            <a:ext cx="2696665" cy="1846659"/>
+          </a:xfrm>
+          <a:prstGeom prst="rect">
+            <a:avLst/>
+          </a:prstGeom>
+          <a:noFill/>
+        </p:spPr>
+        <p:txBody>
+          <a:bodyPr wrap="square" rtlCol="0">
+            <a:spAutoFit/>
+          </a:bodyPr>
+          <a:lstStyle/>
+          <a:p>
+            <a:pPr algn="ctr"/>
+            <a:r>
+              <a:rPr lang="en-US" altLang="zh-TW" sz="3800" b="1" dirty="0">
+                <a:solidFill>
+                  <a:srgbClr val="FFFF00"/>
+                </a:solidFill>
+                <a:latin typeface="微軟正黑體" panose="020B0604030504040204" pitchFamily="34" charset="-120"/>
+                <a:ea typeface="微軟正黑體" panose="020B0604030504040204" pitchFamily="34" charset="-120"/>
+                <a:cs typeface="Arial" panose="020B0604020202020204" pitchFamily="34" charset="0"/>
+              </a:rPr>
+              <a:t>2023</a:t>
+            </a:r>
+            <a:r>
+              <a:rPr lang="zh-TW" altLang="en-US" sz="3800" b="1" dirty="0">
+                <a:solidFill>
+                  <a:srgbClr val="FFFF00"/>
+                </a:solidFill>
+                <a:latin typeface="微軟正黑體" panose="020B0604030504040204" pitchFamily="34" charset="-120"/>
+                <a:ea typeface="微軟正黑體" panose="020B0604030504040204" pitchFamily="34" charset="-120"/>
+                <a:cs typeface="Arial" panose="020B0604020202020204" pitchFamily="34" charset="0"/>
+              </a:rPr>
+              <a:t>年</a:t>
+            </a:r>
+            <a:endParaRPr lang="en-US" altLang="zh-TW" sz="3800" b="1" dirty="0">
+              <a:solidFill>
+                <a:srgbClr val="FFFF00"/>
+              </a:solidFill>
+              <a:latin typeface="微軟正黑體" panose="020B0604030504040204" pitchFamily="34" charset="-120"/>
+              <a:ea typeface="微軟正黑體" panose="020B0604030504040204" pitchFamily="34" charset="-120"/>
+              <a:cs typeface="Arial" panose="020B0604020202020204" pitchFamily="34" charset="0"/>
+            </a:endParaRPr>
+          </a:p>
+          <a:p>
+            <a:pPr algn="ctr"/>
+            <a:r>
+              <a:rPr lang="en-US" altLang="zh-TW" sz="3800" b="1" dirty="0">
+                <a:solidFill>
+                  <a:srgbClr val="FFFF00"/>
+                </a:solidFill>
+                <a:latin typeface="微軟正黑體" panose="020B0604030504040204" pitchFamily="34" charset="-120"/>
+                <a:ea typeface="微軟正黑體" panose="020B0604030504040204" pitchFamily="34" charset="-120"/>
+                <a:cs typeface="Arial" panose="020B0604020202020204" pitchFamily="34" charset="0"/>
+              </a:rPr>
+              <a:t>9</a:t>
+            </a:r>
+            <a:r>
+              <a:rPr lang="zh-TW" altLang="en-US" sz="3800" b="1" dirty="0">
+                <a:solidFill>
+                  <a:srgbClr val="FFFF00"/>
+                </a:solidFill>
+                <a:latin typeface="微軟正黑體" panose="020B0604030504040204" pitchFamily="34" charset="-120"/>
+                <a:ea typeface="微軟正黑體" panose="020B0604030504040204" pitchFamily="34" charset="-120"/>
+                <a:cs typeface="Arial" panose="020B0604020202020204" pitchFamily="34" charset="0"/>
+              </a:rPr>
+              <a:t>月</a:t>
+            </a:r>
+            <a:endParaRPr lang="en-US" altLang="zh-TW" sz="3800" b="1" dirty="0">
+              <a:solidFill>
+                <a:srgbClr val="FFFF00"/>
+              </a:solidFill>
+              <a:latin typeface="微軟正黑體" panose="020B0604030504040204" pitchFamily="34" charset="-120"/>
+              <a:ea typeface="微軟正黑體" panose="020B0604030504040204" pitchFamily="34" charset="-120"/>
+              <a:cs typeface="Arial" panose="020B0604020202020204" pitchFamily="34" charset="0"/>
+            </a:endParaRPr>
+          </a:p>
+          <a:p>
+            <a:pPr algn="ctr"/>
+            <a:r>
+              <a:rPr lang="en-US" altLang="zh-TW" sz="3800" b="1" dirty="0">
+                <a:solidFill>
+                  <a:srgbClr val="FFFF00"/>
+                </a:solidFill>
+                <a:latin typeface="微軟正黑體" panose="020B0604030504040204" pitchFamily="34" charset="-120"/>
+                <a:ea typeface="微軟正黑體" panose="020B0604030504040204" pitchFamily="34" charset="-120"/>
+                <a:cs typeface="Arial" panose="020B0604020202020204" pitchFamily="34" charset="0"/>
+              </a:rPr>
+              <a:t>25</a:t>
+            </a:r>
+            <a:r>
+              <a:rPr lang="zh-TW" altLang="en-US" sz="3800" b="1" dirty="0">
+                <a:solidFill>
+                  <a:srgbClr val="FFFF00"/>
+                </a:solidFill>
+                <a:latin typeface="微軟正黑體" panose="020B0604030504040204" pitchFamily="34" charset="-120"/>
+                <a:ea typeface="微軟正黑體" panose="020B0604030504040204" pitchFamily="34" charset="-120"/>
+                <a:cs typeface="Arial" panose="020B0604020202020204" pitchFamily="34" charset="0"/>
+              </a:rPr>
+              <a:t>日</a:t>
+            </a:r>
+            <a:endParaRPr lang="en-US" altLang="zh-TW" sz="3800" b="1" dirty="0">
+              <a:solidFill>
+                <a:srgbClr val="FFFF00"/>
+              </a:solidFill>
+              <a:latin typeface="微軟正黑體" panose="020B0604030504040204" pitchFamily="34" charset="-120"/>
+              <a:ea typeface="微軟正黑體" panose="020B0604030504040204" pitchFamily="34" charset="-120"/>
+              <a:cs typeface="Arial" panose="020B0604020202020204" pitchFamily="34" charset="0"/>
+            </a:endParaRPr>
+          </a:p>
+        </p:txBody>
+      </p:sp>
+    </p:spTree>
+    <p:extLst>
+      <p:ext uri="{BB962C8B-B14F-4D97-AF65-F5344CB8AC3E}">
+        <p14:creationId xmlns:p14="http://schemas.microsoft.com/office/powerpoint/2010/main" val="2524758357"/>
       </p:ext>
     </p:extLst>
   </p:cSld>
@@ -3626,10 +5557,10 @@
       </p:grpSpPr>
       <p:pic>
         <p:nvPicPr>
-          <p:cNvPr id="5" name="圖片 4">
-            <a:extLst>
-              <a:ext uri="{FF2B5EF4-FFF2-40B4-BE49-F238E27FC236}">
-                <a16:creationId xmlns:a16="http://schemas.microsoft.com/office/drawing/2014/main" id="{8A400D96-E098-41D2-A91B-9ECA52293B58}"/>
+          <p:cNvPr id="2" name="圖片 1">
+            <a:extLst>
+              <a:ext uri="{FF2B5EF4-FFF2-40B4-BE49-F238E27FC236}">
+                <a16:creationId xmlns:a16="http://schemas.microsoft.com/office/drawing/2014/main" id="{9FDD481A-E403-49A7-B4CC-463C61F60B8D}"/>
               </a:ext>
             </a:extLst>
           </p:cNvPr>
@@ -3652,8 +5583,8 @@
         </p:blipFill>
         <p:spPr>
           <a:xfrm>
-            <a:off x="4747667" y="1785273"/>
-            <a:ext cx="2696665" cy="3287454"/>
+            <a:off x="4742903" y="1780506"/>
+            <a:ext cx="2706194" cy="3296983"/>
           </a:xfrm>
           <a:prstGeom prst="rect">
             <a:avLst/>
@@ -3662,10 +5593,64 @@
       </p:pic>
       <p:sp>
         <p:nvSpPr>
-          <p:cNvPr id="6" name="文字方塊 5">
-            <a:extLst>
-              <a:ext uri="{FF2B5EF4-FFF2-40B4-BE49-F238E27FC236}">
-                <a16:creationId xmlns:a16="http://schemas.microsoft.com/office/drawing/2014/main" id="{F436194E-B337-49D9-BAAE-6F0BBA69FC4E}"/>
+          <p:cNvPr id="3" name="矩形 2">
+            <a:extLst>
+              <a:ext uri="{FF2B5EF4-FFF2-40B4-BE49-F238E27FC236}">
+                <a16:creationId xmlns:a16="http://schemas.microsoft.com/office/drawing/2014/main" id="{E8212E41-E03F-4B2D-9E79-7A805049357A}"/>
+              </a:ext>
+            </a:extLst>
+          </p:cNvPr>
+          <p:cNvSpPr/>
+          <p:nvPr/>
+        </p:nvSpPr>
+        <p:spPr>
+          <a:xfrm>
+            <a:off x="4742903" y="1779889"/>
+            <a:ext cx="2725200" cy="3297600"/>
+          </a:xfrm>
+          <a:prstGeom prst="rect">
+            <a:avLst/>
+          </a:prstGeom>
+          <a:solidFill>
+            <a:schemeClr val="tx1">
+              <a:alpha val="55000"/>
+            </a:schemeClr>
+          </a:solidFill>
+          <a:ln>
+            <a:noFill/>
+          </a:ln>
+        </p:spPr>
+        <p:style>
+          <a:lnRef idx="2">
+            <a:schemeClr val="accent1">
+              <a:shade val="50000"/>
+            </a:schemeClr>
+          </a:lnRef>
+          <a:fillRef idx="1">
+            <a:schemeClr val="accent1"/>
+          </a:fillRef>
+          <a:effectRef idx="0">
+            <a:schemeClr val="accent1"/>
+          </a:effectRef>
+          <a:fontRef idx="minor">
+            <a:schemeClr val="lt1"/>
+          </a:fontRef>
+        </p:style>
+        <p:txBody>
+          <a:bodyPr rtlCol="0" anchor="ctr"/>
+          <a:lstStyle/>
+          <a:p>
+            <a:pPr algn="ctr"/>
+            <a:endParaRPr lang="zh-TW" altLang="en-US"/>
+          </a:p>
+        </p:txBody>
+      </p:sp>
+      <p:sp>
+        <p:nvSpPr>
+          <p:cNvPr id="4" name="文字方塊 3">
+            <a:extLst>
+              <a:ext uri="{FF2B5EF4-FFF2-40B4-BE49-F238E27FC236}">
+                <a16:creationId xmlns:a16="http://schemas.microsoft.com/office/drawing/2014/main" id="{808D231E-E016-4045-B998-2DC01F7706EA}"/>
               </a:ext>
             </a:extLst>
           </p:cNvPr>
@@ -3674,8 +5659,8 @@
         </p:nvSpPr>
         <p:spPr>
           <a:xfrm>
-            <a:off x="4747666" y="1859339"/>
-            <a:ext cx="2696665" cy="3139321"/>
+            <a:off x="4761909" y="2505359"/>
+            <a:ext cx="2706194" cy="1846659"/>
           </a:xfrm>
           <a:prstGeom prst="rect">
             <a:avLst/>
@@ -3690,229 +5675,276 @@
           <a:p>
             <a:pPr algn="ctr"/>
             <a:r>
-              <a:rPr lang="zh-TW" altLang="en-US" sz="6600" dirty="0">
-                <a:ln>
-                  <a:solidFill>
-                    <a:schemeClr val="tx1"/>
-                  </a:solidFill>
-                </a:ln>
-                <a:gradFill flip="none" rotWithShape="1">
-                  <a:gsLst>
-                    <a:gs pos="0">
-                      <a:srgbClr val="FFFF00">
-                        <a:shade val="30000"/>
-                        <a:satMod val="115000"/>
-                      </a:srgbClr>
-                    </a:gs>
-                    <a:gs pos="50000">
-                      <a:srgbClr val="FFFF00">
-                        <a:shade val="67500"/>
-                        <a:satMod val="115000"/>
-                      </a:srgbClr>
-                    </a:gs>
-                    <a:gs pos="100000">
-                      <a:srgbClr val="FFFF00">
-                        <a:shade val="100000"/>
-                        <a:satMod val="115000"/>
-                      </a:srgbClr>
-                    </a:gs>
-                  </a:gsLst>
-                  <a:path path="circle">
-                    <a:fillToRect l="100000" t="100000"/>
-                  </a:path>
-                  <a:tileRect r="-100000" b="-100000"/>
-                </a:gradFill>
-                <a:latin typeface="Arial" panose="020B0604020202020204" pitchFamily="34" charset="0"/>
+              <a:rPr lang="zh-TW" altLang="en-US" sz="3800" b="1" dirty="0">
+                <a:solidFill>
+                  <a:schemeClr val="bg1"/>
+                </a:solidFill>
+                <a:latin typeface="微軟正黑體" panose="020B0604030504040204" pitchFamily="34" charset="-120"/>
+                <a:ea typeface="微軟正黑體" panose="020B0604030504040204" pitchFamily="34" charset="-120"/>
+              </a:rPr>
+              <a:t>社會</a:t>
+            </a:r>
+            <a:endParaRPr lang="en-US" altLang="zh-TW" sz="3800" b="1" dirty="0">
+              <a:solidFill>
+                <a:schemeClr val="bg1"/>
+              </a:solidFill>
+              <a:latin typeface="微軟正黑體" panose="020B0604030504040204" pitchFamily="34" charset="-120"/>
+              <a:ea typeface="微軟正黑體" panose="020B0604030504040204" pitchFamily="34" charset="-120"/>
+            </a:endParaRPr>
+          </a:p>
+          <a:p>
+            <a:pPr algn="ctr"/>
+            <a:r>
+              <a:rPr lang="zh-TW" altLang="en-US" sz="3800" b="1" dirty="0">
+                <a:solidFill>
+                  <a:schemeClr val="bg1"/>
+                </a:solidFill>
+                <a:latin typeface="微軟正黑體" panose="020B0604030504040204" pitchFamily="34" charset="-120"/>
+                <a:ea typeface="微軟正黑體" panose="020B0604030504040204" pitchFamily="34" charset="-120"/>
+              </a:rPr>
+              <a:t>責任</a:t>
+            </a:r>
+            <a:endParaRPr lang="en-US" altLang="zh-TW" sz="3800" b="1" dirty="0">
+              <a:solidFill>
+                <a:schemeClr val="bg1"/>
+              </a:solidFill>
+              <a:latin typeface="微軟正黑體" panose="020B0604030504040204" pitchFamily="34" charset="-120"/>
+              <a:ea typeface="微軟正黑體" panose="020B0604030504040204" pitchFamily="34" charset="-120"/>
+            </a:endParaRPr>
+          </a:p>
+          <a:p>
+            <a:pPr algn="ctr"/>
+            <a:r>
+              <a:rPr lang="zh-TW" altLang="en-US" sz="3800" b="1" dirty="0">
+                <a:solidFill>
+                  <a:schemeClr val="bg1"/>
+                </a:solidFill>
+                <a:latin typeface="微軟正黑體" panose="020B0604030504040204" pitchFamily="34" charset="-120"/>
+                <a:ea typeface="微軟正黑體" panose="020B0604030504040204" pitchFamily="34" charset="-120"/>
+              </a:rPr>
+              <a:t>債券</a:t>
+            </a:r>
+            <a:endParaRPr lang="en-US" altLang="zh-TW" sz="3800" b="1" dirty="0">
+              <a:solidFill>
+                <a:schemeClr val="bg1"/>
+              </a:solidFill>
+              <a:latin typeface="微軟正黑體" panose="020B0604030504040204" pitchFamily="34" charset="-120"/>
+              <a:ea typeface="微軟正黑體" panose="020B0604030504040204" pitchFamily="34" charset="-120"/>
+            </a:endParaRPr>
+          </a:p>
+        </p:txBody>
+      </p:sp>
+    </p:spTree>
+    <p:extLst>
+      <p:ext uri="{BB962C8B-B14F-4D97-AF65-F5344CB8AC3E}">
+        <p14:creationId xmlns:p14="http://schemas.microsoft.com/office/powerpoint/2010/main" val="619880995"/>
+      </p:ext>
+    </p:extLst>
+  </p:cSld>
+  <p:clrMapOvr>
+    <a:masterClrMapping/>
+  </p:clrMapOvr>
+</p:sld>
+</file>
+
+<file path=ppt/slides/slide20.xml><?xml version="1.0" encoding="utf-8"?>
+<p:sld xmlns:a="http://schemas.openxmlformats.org/drawingml/2006/main" xmlns:r="http://schemas.openxmlformats.org/officeDocument/2006/relationships" xmlns:p="http://schemas.openxmlformats.org/presentationml/2006/main">
+  <p:cSld>
+    <p:spTree>
+      <p:nvGrpSpPr>
+        <p:cNvPr id="1" name=""/>
+        <p:cNvGrpSpPr/>
+        <p:nvPr/>
+      </p:nvGrpSpPr>
+      <p:grpSpPr>
+        <a:xfrm>
+          <a:off x="0" y="0"/>
+          <a:ext cx="0" cy="0"/>
+          <a:chOff x="0" y="0"/>
+          <a:chExt cx="0" cy="0"/>
+        </a:xfrm>
+      </p:grpSpPr>
+      <p:pic>
+        <p:nvPicPr>
+          <p:cNvPr id="5" name="圖片 4">
+            <a:extLst>
+              <a:ext uri="{FF2B5EF4-FFF2-40B4-BE49-F238E27FC236}">
+                <a16:creationId xmlns:a16="http://schemas.microsoft.com/office/drawing/2014/main" id="{8A400D96-E098-41D2-A91B-9ECA52293B58}"/>
+              </a:ext>
+            </a:extLst>
+          </p:cNvPr>
+          <p:cNvPicPr>
+            <a:picLocks noChangeAspect="1"/>
+          </p:cNvPicPr>
+          <p:nvPr/>
+        </p:nvPicPr>
+        <p:blipFill>
+          <a:blip r:embed="rId2">
+            <a:extLst>
+              <a:ext uri="{28A0092B-C50C-407E-A947-70E740481C1C}">
+                <a14:useLocalDpi xmlns:a14="http://schemas.microsoft.com/office/drawing/2010/main" val="0"/>
+              </a:ext>
+            </a:extLst>
+          </a:blip>
+          <a:stretch>
+            <a:fillRect/>
+          </a:stretch>
+        </p:blipFill>
+        <p:spPr>
+          <a:xfrm>
+            <a:off x="4747667" y="1785273"/>
+            <a:ext cx="2696665" cy="3287454"/>
+          </a:xfrm>
+          <a:prstGeom prst="rect">
+            <a:avLst/>
+          </a:prstGeom>
+        </p:spPr>
+      </p:pic>
+      <p:sp>
+        <p:nvSpPr>
+          <p:cNvPr id="2" name="矩形 1">
+            <a:extLst>
+              <a:ext uri="{FF2B5EF4-FFF2-40B4-BE49-F238E27FC236}">
+                <a16:creationId xmlns:a16="http://schemas.microsoft.com/office/drawing/2014/main" id="{9B4AEE40-7564-9AB1-070F-7148E319AEC7}"/>
+              </a:ext>
+            </a:extLst>
+          </p:cNvPr>
+          <p:cNvSpPr/>
+          <p:nvPr/>
+        </p:nvSpPr>
+        <p:spPr>
+          <a:xfrm>
+            <a:off x="4742903" y="1779889"/>
+            <a:ext cx="2725200" cy="3297600"/>
+          </a:xfrm>
+          <a:prstGeom prst="rect">
+            <a:avLst/>
+          </a:prstGeom>
+          <a:solidFill>
+            <a:schemeClr val="bg1">
+              <a:alpha val="30000"/>
+            </a:schemeClr>
+          </a:solidFill>
+          <a:ln>
+            <a:noFill/>
+          </a:ln>
+        </p:spPr>
+        <p:style>
+          <a:lnRef idx="2">
+            <a:schemeClr val="accent1">
+              <a:shade val="50000"/>
+            </a:schemeClr>
+          </a:lnRef>
+          <a:fillRef idx="1">
+            <a:schemeClr val="accent1"/>
+          </a:fillRef>
+          <a:effectRef idx="0">
+            <a:schemeClr val="accent1"/>
+          </a:effectRef>
+          <a:fontRef idx="minor">
+            <a:schemeClr val="lt1"/>
+          </a:fontRef>
+        </p:style>
+        <p:txBody>
+          <a:bodyPr rtlCol="0" anchor="ctr"/>
+          <a:lstStyle/>
+          <a:p>
+            <a:pPr algn="ctr"/>
+            <a:endParaRPr lang="zh-TW" altLang="en-US"/>
+          </a:p>
+        </p:txBody>
+      </p:sp>
+      <p:sp>
+        <p:nvSpPr>
+          <p:cNvPr id="6" name="文字方塊 5">
+            <a:extLst>
+              <a:ext uri="{FF2B5EF4-FFF2-40B4-BE49-F238E27FC236}">
+                <a16:creationId xmlns:a16="http://schemas.microsoft.com/office/drawing/2014/main" id="{F436194E-B337-49D9-BAAE-6F0BBA69FC4E}"/>
+              </a:ext>
+            </a:extLst>
+          </p:cNvPr>
+          <p:cNvSpPr txBox="1"/>
+          <p:nvPr/>
+        </p:nvSpPr>
+        <p:spPr>
+          <a:xfrm>
+            <a:off x="4742903" y="2505359"/>
+            <a:ext cx="2696665" cy="1846659"/>
+          </a:xfrm>
+          <a:prstGeom prst="rect">
+            <a:avLst/>
+          </a:prstGeom>
+          <a:noFill/>
+        </p:spPr>
+        <p:txBody>
+          <a:bodyPr wrap="square" rtlCol="0">
+            <a:spAutoFit/>
+          </a:bodyPr>
+          <a:lstStyle/>
+          <a:p>
+            <a:pPr algn="ctr"/>
+            <a:r>
+              <a:rPr lang="zh-TW" altLang="en-US" sz="3800" b="1" dirty="0">
+                <a:solidFill>
+                  <a:srgbClr val="FFFF00"/>
+                </a:solidFill>
+                <a:latin typeface="微軟正黑體" panose="020B0604030504040204" pitchFamily="34" charset="-120"/>
+                <a:ea typeface="微軟正黑體" panose="020B0604030504040204" pitchFamily="34" charset="-120"/>
                 <a:cs typeface="Arial" panose="020B0604020202020204" pitchFamily="34" charset="0"/>
               </a:rPr>
               <a:t>兆豐</a:t>
             </a:r>
-            <a:endParaRPr lang="en-US" altLang="zh-TW" sz="6600" dirty="0">
-              <a:ln>
-                <a:solidFill>
-                  <a:schemeClr val="tx1"/>
-                </a:solidFill>
-              </a:ln>
-              <a:gradFill flip="none" rotWithShape="1">
-                <a:gsLst>
-                  <a:gs pos="0">
-                    <a:srgbClr val="FFFF00">
-                      <a:shade val="30000"/>
-                      <a:satMod val="115000"/>
-                    </a:srgbClr>
-                  </a:gs>
-                  <a:gs pos="50000">
-                    <a:srgbClr val="FFFF00">
-                      <a:shade val="67500"/>
-                      <a:satMod val="115000"/>
-                    </a:srgbClr>
-                  </a:gs>
-                  <a:gs pos="100000">
-                    <a:srgbClr val="FFFF00">
-                      <a:shade val="100000"/>
-                      <a:satMod val="115000"/>
-                    </a:srgbClr>
-                  </a:gs>
-                </a:gsLst>
-                <a:path path="circle">
-                  <a:fillToRect l="100000" t="100000"/>
-                </a:path>
-                <a:tileRect r="-100000" b="-100000"/>
-              </a:gradFill>
-              <a:latin typeface="Arial" panose="020B0604020202020204" pitchFamily="34" charset="0"/>
+            <a:endParaRPr lang="en-US" altLang="zh-TW" sz="3800" b="1" dirty="0">
+              <a:solidFill>
+                <a:srgbClr val="FFFF00"/>
+              </a:solidFill>
+              <a:latin typeface="微軟正黑體" panose="020B0604030504040204" pitchFamily="34" charset="-120"/>
+              <a:ea typeface="微軟正黑體" panose="020B0604030504040204" pitchFamily="34" charset="-120"/>
               <a:cs typeface="Arial" panose="020B0604020202020204" pitchFamily="34" charset="0"/>
             </a:endParaRPr>
           </a:p>
           <a:p>
             <a:pPr algn="ctr"/>
             <a:r>
-              <a:rPr lang="zh-TW" altLang="en-US" sz="6600" dirty="0">
-                <a:ln>
-                  <a:solidFill>
-                    <a:schemeClr val="tx1"/>
-                  </a:solidFill>
-                </a:ln>
-                <a:gradFill flip="none" rotWithShape="1">
-                  <a:gsLst>
-                    <a:gs pos="0">
-                      <a:srgbClr val="FFFF00">
-                        <a:shade val="30000"/>
-                        <a:satMod val="115000"/>
-                      </a:srgbClr>
-                    </a:gs>
-                    <a:gs pos="50000">
-                      <a:srgbClr val="FFFF00">
-                        <a:shade val="67500"/>
-                        <a:satMod val="115000"/>
-                      </a:srgbClr>
-                    </a:gs>
-                    <a:gs pos="100000">
-                      <a:srgbClr val="FFFF00">
-                        <a:shade val="100000"/>
-                        <a:satMod val="115000"/>
-                      </a:srgbClr>
-                    </a:gs>
-                  </a:gsLst>
-                  <a:path path="circle">
-                    <a:fillToRect l="100000" t="100000"/>
-                  </a:path>
-                  <a:tileRect r="-100000" b="-100000"/>
-                </a:gradFill>
-                <a:latin typeface="Arial" panose="020B0604020202020204" pitchFamily="34" charset="0"/>
+              <a:rPr lang="zh-TW" altLang="en-US" sz="3800" b="1" dirty="0">
+                <a:solidFill>
+                  <a:srgbClr val="FFFF00"/>
+                </a:solidFill>
+                <a:latin typeface="微軟正黑體" panose="020B0604030504040204" pitchFamily="34" charset="-120"/>
+                <a:ea typeface="微軟正黑體" panose="020B0604030504040204" pitchFamily="34" charset="-120"/>
                 <a:cs typeface="Arial" panose="020B0604020202020204" pitchFamily="34" charset="0"/>
               </a:rPr>
               <a:t>淨零</a:t>
             </a:r>
-            <a:endParaRPr lang="en-US" altLang="zh-TW" sz="6600" dirty="0">
-              <a:ln>
-                <a:solidFill>
-                  <a:schemeClr val="tx1"/>
-                </a:solidFill>
-              </a:ln>
-              <a:gradFill flip="none" rotWithShape="1">
-                <a:gsLst>
-                  <a:gs pos="0">
-                    <a:srgbClr val="FFFF00">
-                      <a:shade val="30000"/>
-                      <a:satMod val="115000"/>
-                    </a:srgbClr>
-                  </a:gs>
-                  <a:gs pos="50000">
-                    <a:srgbClr val="FFFF00">
-                      <a:shade val="67500"/>
-                      <a:satMod val="115000"/>
-                    </a:srgbClr>
-                  </a:gs>
-                  <a:gs pos="100000">
-                    <a:srgbClr val="FFFF00">
-                      <a:shade val="100000"/>
-                      <a:satMod val="115000"/>
-                    </a:srgbClr>
-                  </a:gs>
-                </a:gsLst>
-                <a:path path="circle">
-                  <a:fillToRect l="100000" t="100000"/>
-                </a:path>
-                <a:tileRect r="-100000" b="-100000"/>
-              </a:gradFill>
-              <a:latin typeface="Arial" panose="020B0604020202020204" pitchFamily="34" charset="0"/>
+            <a:endParaRPr lang="en-US" altLang="zh-TW" sz="3800" b="1" dirty="0">
+              <a:solidFill>
+                <a:srgbClr val="FFFF00"/>
+              </a:solidFill>
+              <a:latin typeface="微軟正黑體" panose="020B0604030504040204" pitchFamily="34" charset="-120"/>
+              <a:ea typeface="微軟正黑體" panose="020B0604030504040204" pitchFamily="34" charset="-120"/>
               <a:cs typeface="Arial" panose="020B0604020202020204" pitchFamily="34" charset="0"/>
             </a:endParaRPr>
           </a:p>
           <a:p>
             <a:pPr algn="ctr"/>
             <a:r>
-              <a:rPr lang="zh-TW" altLang="en-US" sz="6600" dirty="0">
-                <a:ln>
-                  <a:solidFill>
-                    <a:schemeClr val="tx1"/>
-                  </a:solidFill>
-                </a:ln>
-                <a:gradFill flip="none" rotWithShape="1">
-                  <a:gsLst>
-                    <a:gs pos="0">
-                      <a:srgbClr val="FFFF00">
-                        <a:shade val="30000"/>
-                        <a:satMod val="115000"/>
-                      </a:srgbClr>
-                    </a:gs>
-                    <a:gs pos="50000">
-                      <a:srgbClr val="FFFF00">
-                        <a:shade val="67500"/>
-                        <a:satMod val="115000"/>
-                      </a:srgbClr>
-                    </a:gs>
-                    <a:gs pos="100000">
-                      <a:srgbClr val="FFFF00">
-                        <a:shade val="100000"/>
-                        <a:satMod val="115000"/>
-                      </a:srgbClr>
-                    </a:gs>
-                  </a:gsLst>
-                  <a:path path="circle">
-                    <a:fillToRect l="100000" t="100000"/>
-                  </a:path>
-                  <a:tileRect r="-100000" b="-100000"/>
-                </a:gradFill>
-                <a:latin typeface="Arial" panose="020B0604020202020204" pitchFamily="34" charset="0"/>
+              <a:rPr lang="zh-TW" altLang="en-US" sz="3800" b="1" dirty="0">
+                <a:solidFill>
+                  <a:srgbClr val="FFFF00"/>
+                </a:solidFill>
+                <a:latin typeface="微軟正黑體" panose="020B0604030504040204" pitchFamily="34" charset="-120"/>
+                <a:ea typeface="微軟正黑體" panose="020B0604030504040204" pitchFamily="34" charset="-120"/>
                 <a:cs typeface="Arial" panose="020B0604020202020204" pitchFamily="34" charset="0"/>
               </a:rPr>
               <a:t>氣候</a:t>
             </a:r>
             <a:r>
-              <a:rPr lang="en-US" altLang="zh-TW" sz="6600" dirty="0">
-                <a:ln>
-                  <a:solidFill>
-                    <a:schemeClr val="tx1"/>
-                  </a:solidFill>
-                </a:ln>
-                <a:gradFill flip="none" rotWithShape="1">
-                  <a:gsLst>
-                    <a:gs pos="0">
-                      <a:srgbClr val="FFFF00">
-                        <a:shade val="30000"/>
-                        <a:satMod val="115000"/>
-                      </a:srgbClr>
-                    </a:gs>
-                    <a:gs pos="50000">
-                      <a:srgbClr val="FFFF00">
-                        <a:shade val="67500"/>
-                        <a:satMod val="115000"/>
-                      </a:srgbClr>
-                    </a:gs>
-                    <a:gs pos="100000">
-                      <a:srgbClr val="FFFF00">
-                        <a:shade val="100000"/>
-                        <a:satMod val="115000"/>
-                      </a:srgbClr>
-                    </a:gs>
-                  </a:gsLst>
-                  <a:path path="circle">
-                    <a:fillToRect l="100000" t="100000"/>
-                  </a:path>
-                  <a:tileRect r="-100000" b="-100000"/>
-                </a:gradFill>
-                <a:latin typeface="Arial" panose="020B0604020202020204" pitchFamily="34" charset="0"/>
+              <a:rPr lang="en-US" altLang="zh-TW" sz="3800" b="1" dirty="0">
+                <a:solidFill>
+                  <a:srgbClr val="FFFF00"/>
+                </a:solidFill>
+                <a:latin typeface="微軟正黑體" panose="020B0604030504040204" pitchFamily="34" charset="-120"/>
+                <a:ea typeface="微軟正黑體" panose="020B0604030504040204" pitchFamily="34" charset="-120"/>
                 <a:cs typeface="Arial" panose="020B0604020202020204" pitchFamily="34" charset="0"/>
               </a:rPr>
               <a:t>N</a:t>
@@ -3923,7 +5955,1535 @@
     </p:spTree>
     <p:extLst>
       <p:ext uri="{BB962C8B-B14F-4D97-AF65-F5344CB8AC3E}">
-        <p14:creationId xmlns:p14="http://schemas.microsoft.com/office/powerpoint/2010/main" val="3795424615"/>
+        <p14:creationId xmlns:p14="http://schemas.microsoft.com/office/powerpoint/2010/main" val="1548921382"/>
+      </p:ext>
+    </p:extLst>
+  </p:cSld>
+  <p:clrMapOvr>
+    <a:masterClrMapping/>
+  </p:clrMapOvr>
+</p:sld>
+</file>
+
+<file path=ppt/slides/slide3.xml><?xml version="1.0" encoding="utf-8"?>
+<p:sld xmlns:a="http://schemas.openxmlformats.org/drawingml/2006/main" xmlns:r="http://schemas.openxmlformats.org/officeDocument/2006/relationships" xmlns:p="http://schemas.openxmlformats.org/presentationml/2006/main">
+  <p:cSld>
+    <p:spTree>
+      <p:nvGrpSpPr>
+        <p:cNvPr id="1" name=""/>
+        <p:cNvGrpSpPr/>
+        <p:nvPr/>
+      </p:nvGrpSpPr>
+      <p:grpSpPr>
+        <a:xfrm>
+          <a:off x="0" y="0"/>
+          <a:ext cx="0" cy="0"/>
+          <a:chOff x="0" y="0"/>
+          <a:chExt cx="0" cy="0"/>
+        </a:xfrm>
+      </p:grpSpPr>
+      <p:pic>
+        <p:nvPicPr>
+          <p:cNvPr id="2" name="圖片 1">
+            <a:extLst>
+              <a:ext uri="{FF2B5EF4-FFF2-40B4-BE49-F238E27FC236}">
+                <a16:creationId xmlns:a16="http://schemas.microsoft.com/office/drawing/2014/main" id="{D7964EDB-2A36-4A8C-A427-903367779BB4}"/>
+              </a:ext>
+            </a:extLst>
+          </p:cNvPr>
+          <p:cNvPicPr>
+            <a:picLocks noChangeAspect="1"/>
+          </p:cNvPicPr>
+          <p:nvPr/>
+        </p:nvPicPr>
+        <p:blipFill>
+          <a:blip r:embed="rId2">
+            <a:extLst>
+              <a:ext uri="{28A0092B-C50C-407E-A947-70E740481C1C}">
+                <a14:useLocalDpi xmlns:a14="http://schemas.microsoft.com/office/drawing/2010/main" val="0"/>
+              </a:ext>
+            </a:extLst>
+          </a:blip>
+          <a:stretch>
+            <a:fillRect/>
+          </a:stretch>
+        </p:blipFill>
+        <p:spPr>
+          <a:xfrm>
+            <a:off x="4742903" y="1780506"/>
+            <a:ext cx="2706194" cy="3296983"/>
+          </a:xfrm>
+          <a:prstGeom prst="rect">
+            <a:avLst/>
+          </a:prstGeom>
+        </p:spPr>
+      </p:pic>
+      <p:sp>
+        <p:nvSpPr>
+          <p:cNvPr id="3" name="矩形 2">
+            <a:extLst>
+              <a:ext uri="{FF2B5EF4-FFF2-40B4-BE49-F238E27FC236}">
+                <a16:creationId xmlns:a16="http://schemas.microsoft.com/office/drawing/2014/main" id="{1BB0225A-49E1-459E-8799-63A85CC2203A}"/>
+              </a:ext>
+            </a:extLst>
+          </p:cNvPr>
+          <p:cNvSpPr/>
+          <p:nvPr/>
+        </p:nvSpPr>
+        <p:spPr>
+          <a:xfrm>
+            <a:off x="4742903" y="1779889"/>
+            <a:ext cx="2725200" cy="3297600"/>
+          </a:xfrm>
+          <a:prstGeom prst="rect">
+            <a:avLst/>
+          </a:prstGeom>
+          <a:solidFill>
+            <a:schemeClr val="tx1">
+              <a:alpha val="55000"/>
+            </a:schemeClr>
+          </a:solidFill>
+          <a:ln>
+            <a:noFill/>
+          </a:ln>
+        </p:spPr>
+        <p:style>
+          <a:lnRef idx="2">
+            <a:schemeClr val="accent1">
+              <a:shade val="50000"/>
+            </a:schemeClr>
+          </a:lnRef>
+          <a:fillRef idx="1">
+            <a:schemeClr val="accent1"/>
+          </a:fillRef>
+          <a:effectRef idx="0">
+            <a:schemeClr val="accent1"/>
+          </a:effectRef>
+          <a:fontRef idx="minor">
+            <a:schemeClr val="lt1"/>
+          </a:fontRef>
+        </p:style>
+        <p:txBody>
+          <a:bodyPr rtlCol="0" anchor="ctr"/>
+          <a:lstStyle/>
+          <a:p>
+            <a:pPr algn="ctr"/>
+            <a:endParaRPr lang="zh-TW" altLang="en-US"/>
+          </a:p>
+        </p:txBody>
+      </p:sp>
+      <p:sp>
+        <p:nvSpPr>
+          <p:cNvPr id="4" name="文字方塊 3">
+            <a:extLst>
+              <a:ext uri="{FF2B5EF4-FFF2-40B4-BE49-F238E27FC236}">
+                <a16:creationId xmlns:a16="http://schemas.microsoft.com/office/drawing/2014/main" id="{843E3332-1887-4194-B72A-A44A685C7CD2}"/>
+              </a:ext>
+            </a:extLst>
+          </p:cNvPr>
+          <p:cNvSpPr txBox="1"/>
+          <p:nvPr/>
+        </p:nvSpPr>
+        <p:spPr>
+          <a:xfrm>
+            <a:off x="4742903" y="2505359"/>
+            <a:ext cx="2706194" cy="1846659"/>
+          </a:xfrm>
+          <a:prstGeom prst="rect">
+            <a:avLst/>
+          </a:prstGeom>
+          <a:noFill/>
+        </p:spPr>
+        <p:txBody>
+          <a:bodyPr wrap="square" rtlCol="0">
+            <a:spAutoFit/>
+          </a:bodyPr>
+          <a:lstStyle/>
+          <a:p>
+            <a:pPr algn="ctr"/>
+            <a:r>
+              <a:rPr lang="zh-TW" altLang="en-US" sz="3800" b="1" dirty="0">
+                <a:solidFill>
+                  <a:schemeClr val="bg1"/>
+                </a:solidFill>
+                <a:latin typeface="微軟正黑體" panose="020B0604030504040204" pitchFamily="34" charset="-120"/>
+                <a:ea typeface="微軟正黑體" panose="020B0604030504040204" pitchFamily="34" charset="-120"/>
+              </a:rPr>
+              <a:t>可持續</a:t>
+            </a:r>
+            <a:endParaRPr lang="en-US" altLang="zh-TW" sz="3800" b="1" dirty="0">
+              <a:solidFill>
+                <a:schemeClr val="bg1"/>
+              </a:solidFill>
+              <a:latin typeface="微軟正黑體" panose="020B0604030504040204" pitchFamily="34" charset="-120"/>
+              <a:ea typeface="微軟正黑體" panose="020B0604030504040204" pitchFamily="34" charset="-120"/>
+            </a:endParaRPr>
+          </a:p>
+          <a:p>
+            <a:pPr algn="ctr"/>
+            <a:r>
+              <a:rPr lang="zh-TW" altLang="en-US" sz="3800" b="1" dirty="0">
+                <a:solidFill>
+                  <a:schemeClr val="bg1"/>
+                </a:solidFill>
+                <a:latin typeface="微軟正黑體" panose="020B0604030504040204" pitchFamily="34" charset="-120"/>
+                <a:ea typeface="微軟正黑體" panose="020B0604030504040204" pitchFamily="34" charset="-120"/>
+              </a:rPr>
+              <a:t>發展</a:t>
+            </a:r>
+            <a:endParaRPr lang="en-US" altLang="zh-TW" sz="3800" b="1" dirty="0">
+              <a:solidFill>
+                <a:schemeClr val="bg1"/>
+              </a:solidFill>
+              <a:latin typeface="微軟正黑體" panose="020B0604030504040204" pitchFamily="34" charset="-120"/>
+              <a:ea typeface="微軟正黑體" panose="020B0604030504040204" pitchFamily="34" charset="-120"/>
+            </a:endParaRPr>
+          </a:p>
+          <a:p>
+            <a:pPr algn="ctr"/>
+            <a:r>
+              <a:rPr lang="zh-TW" altLang="en-US" sz="3800" b="1" dirty="0">
+                <a:solidFill>
+                  <a:schemeClr val="bg1"/>
+                </a:solidFill>
+                <a:latin typeface="微軟正黑體" panose="020B0604030504040204" pitchFamily="34" charset="-120"/>
+                <a:ea typeface="微軟正黑體" panose="020B0604030504040204" pitchFamily="34" charset="-120"/>
+              </a:rPr>
+              <a:t>債券</a:t>
+            </a:r>
+            <a:endParaRPr lang="en-US" altLang="zh-TW" sz="3800" b="1" dirty="0">
+              <a:solidFill>
+                <a:schemeClr val="bg1"/>
+              </a:solidFill>
+              <a:latin typeface="微軟正黑體" panose="020B0604030504040204" pitchFamily="34" charset="-120"/>
+              <a:ea typeface="微軟正黑體" panose="020B0604030504040204" pitchFamily="34" charset="-120"/>
+            </a:endParaRPr>
+          </a:p>
+        </p:txBody>
+      </p:sp>
+    </p:spTree>
+    <p:extLst>
+      <p:ext uri="{BB962C8B-B14F-4D97-AF65-F5344CB8AC3E}">
+        <p14:creationId xmlns:p14="http://schemas.microsoft.com/office/powerpoint/2010/main" val="544316646"/>
+      </p:ext>
+    </p:extLst>
+  </p:cSld>
+  <p:clrMapOvr>
+    <a:masterClrMapping/>
+  </p:clrMapOvr>
+</p:sld>
+</file>
+
+<file path=ppt/slides/slide4.xml><?xml version="1.0" encoding="utf-8"?>
+<p:sld xmlns:a="http://schemas.openxmlformats.org/drawingml/2006/main" xmlns:r="http://schemas.openxmlformats.org/officeDocument/2006/relationships" xmlns:p="http://schemas.openxmlformats.org/presentationml/2006/main">
+  <p:cSld>
+    <p:spTree>
+      <p:nvGrpSpPr>
+        <p:cNvPr id="1" name=""/>
+        <p:cNvGrpSpPr/>
+        <p:nvPr/>
+      </p:nvGrpSpPr>
+      <p:grpSpPr>
+        <a:xfrm>
+          <a:off x="0" y="0"/>
+          <a:ext cx="0" cy="0"/>
+          <a:chOff x="0" y="0"/>
+          <a:chExt cx="0" cy="0"/>
+        </a:xfrm>
+      </p:grpSpPr>
+      <p:pic>
+        <p:nvPicPr>
+          <p:cNvPr id="2" name="圖片 1">
+            <a:extLst>
+              <a:ext uri="{FF2B5EF4-FFF2-40B4-BE49-F238E27FC236}">
+                <a16:creationId xmlns:a16="http://schemas.microsoft.com/office/drawing/2014/main" id="{4F0A3720-F2EA-40F1-90D7-2469F6C554CD}"/>
+              </a:ext>
+            </a:extLst>
+          </p:cNvPr>
+          <p:cNvPicPr>
+            <a:picLocks noChangeAspect="1"/>
+          </p:cNvPicPr>
+          <p:nvPr/>
+        </p:nvPicPr>
+        <p:blipFill>
+          <a:blip r:embed="rId2">
+            <a:extLst>
+              <a:ext uri="{28A0092B-C50C-407E-A947-70E740481C1C}">
+                <a14:useLocalDpi xmlns:a14="http://schemas.microsoft.com/office/drawing/2010/main" val="0"/>
+              </a:ext>
+            </a:extLst>
+          </a:blip>
+          <a:stretch>
+            <a:fillRect/>
+          </a:stretch>
+        </p:blipFill>
+        <p:spPr>
+          <a:xfrm>
+            <a:off x="4742903" y="1780506"/>
+            <a:ext cx="2706194" cy="3296983"/>
+          </a:xfrm>
+          <a:prstGeom prst="rect">
+            <a:avLst/>
+          </a:prstGeom>
+        </p:spPr>
+      </p:pic>
+      <p:sp>
+        <p:nvSpPr>
+          <p:cNvPr id="3" name="矩形 2">
+            <a:extLst>
+              <a:ext uri="{FF2B5EF4-FFF2-40B4-BE49-F238E27FC236}">
+                <a16:creationId xmlns:a16="http://schemas.microsoft.com/office/drawing/2014/main" id="{40BBB3E5-1D0A-4F35-AE00-086E6ECABE9C}"/>
+              </a:ext>
+            </a:extLst>
+          </p:cNvPr>
+          <p:cNvSpPr/>
+          <p:nvPr/>
+        </p:nvSpPr>
+        <p:spPr>
+          <a:xfrm>
+            <a:off x="4742903" y="1779889"/>
+            <a:ext cx="2725200" cy="3297600"/>
+          </a:xfrm>
+          <a:prstGeom prst="rect">
+            <a:avLst/>
+          </a:prstGeom>
+          <a:solidFill>
+            <a:schemeClr val="tx1">
+              <a:alpha val="55000"/>
+            </a:schemeClr>
+          </a:solidFill>
+          <a:ln>
+            <a:noFill/>
+          </a:ln>
+        </p:spPr>
+        <p:style>
+          <a:lnRef idx="2">
+            <a:schemeClr val="accent1">
+              <a:shade val="50000"/>
+            </a:schemeClr>
+          </a:lnRef>
+          <a:fillRef idx="1">
+            <a:schemeClr val="accent1"/>
+          </a:fillRef>
+          <a:effectRef idx="0">
+            <a:schemeClr val="accent1"/>
+          </a:effectRef>
+          <a:fontRef idx="minor">
+            <a:schemeClr val="lt1"/>
+          </a:fontRef>
+        </p:style>
+        <p:txBody>
+          <a:bodyPr rtlCol="0" anchor="ctr"/>
+          <a:lstStyle/>
+          <a:p>
+            <a:pPr algn="ctr"/>
+            <a:endParaRPr lang="zh-TW" altLang="en-US"/>
+          </a:p>
+        </p:txBody>
+      </p:sp>
+      <p:sp>
+        <p:nvSpPr>
+          <p:cNvPr id="4" name="文字方塊 3">
+            <a:extLst>
+              <a:ext uri="{FF2B5EF4-FFF2-40B4-BE49-F238E27FC236}">
+                <a16:creationId xmlns:a16="http://schemas.microsoft.com/office/drawing/2014/main" id="{EA50F221-7FE7-48BA-A934-9122B8D64217}"/>
+              </a:ext>
+            </a:extLst>
+          </p:cNvPr>
+          <p:cNvSpPr txBox="1"/>
+          <p:nvPr/>
+        </p:nvSpPr>
+        <p:spPr>
+          <a:xfrm>
+            <a:off x="4742903" y="2505359"/>
+            <a:ext cx="2706194" cy="1846659"/>
+          </a:xfrm>
+          <a:prstGeom prst="rect">
+            <a:avLst/>
+          </a:prstGeom>
+          <a:noFill/>
+        </p:spPr>
+        <p:txBody>
+          <a:bodyPr wrap="square" rtlCol="0">
+            <a:spAutoFit/>
+          </a:bodyPr>
+          <a:lstStyle/>
+          <a:p>
+            <a:pPr algn="ctr"/>
+            <a:r>
+              <a:rPr lang="zh-TW" altLang="en-US" sz="3800" b="1" dirty="0">
+                <a:solidFill>
+                  <a:schemeClr val="bg1"/>
+                </a:solidFill>
+                <a:latin typeface="微軟正黑體" panose="020B0604030504040204" pitchFamily="34" charset="-120"/>
+                <a:ea typeface="微軟正黑體" panose="020B0604030504040204" pitchFamily="34" charset="-120"/>
+              </a:rPr>
+              <a:t>可持續</a:t>
+            </a:r>
+            <a:endParaRPr lang="en-US" altLang="zh-TW" sz="3800" b="1" dirty="0">
+              <a:solidFill>
+                <a:schemeClr val="bg1"/>
+              </a:solidFill>
+              <a:latin typeface="微軟正黑體" panose="020B0604030504040204" pitchFamily="34" charset="-120"/>
+              <a:ea typeface="微軟正黑體" panose="020B0604030504040204" pitchFamily="34" charset="-120"/>
+            </a:endParaRPr>
+          </a:p>
+          <a:p>
+            <a:pPr algn="ctr"/>
+            <a:r>
+              <a:rPr lang="zh-TW" altLang="en-US" sz="3800" b="1" dirty="0">
+                <a:solidFill>
+                  <a:schemeClr val="bg1"/>
+                </a:solidFill>
+                <a:latin typeface="微軟正黑體" panose="020B0604030504040204" pitchFamily="34" charset="-120"/>
+                <a:ea typeface="微軟正黑體" panose="020B0604030504040204" pitchFamily="34" charset="-120"/>
+              </a:rPr>
+              <a:t>發展連結</a:t>
+            </a:r>
+            <a:endParaRPr lang="en-US" altLang="zh-TW" sz="3800" b="1" dirty="0">
+              <a:solidFill>
+                <a:schemeClr val="bg1"/>
+              </a:solidFill>
+              <a:latin typeface="微軟正黑體" panose="020B0604030504040204" pitchFamily="34" charset="-120"/>
+              <a:ea typeface="微軟正黑體" panose="020B0604030504040204" pitchFamily="34" charset="-120"/>
+            </a:endParaRPr>
+          </a:p>
+          <a:p>
+            <a:pPr algn="ctr"/>
+            <a:r>
+              <a:rPr lang="zh-TW" altLang="en-US" sz="3800" b="1" dirty="0">
+                <a:solidFill>
+                  <a:schemeClr val="bg1"/>
+                </a:solidFill>
+                <a:latin typeface="微軟正黑體" panose="020B0604030504040204" pitchFamily="34" charset="-120"/>
+                <a:ea typeface="微軟正黑體" panose="020B0604030504040204" pitchFamily="34" charset="-120"/>
+              </a:rPr>
+              <a:t>債券</a:t>
+            </a:r>
+            <a:endParaRPr lang="en-US" altLang="zh-TW" sz="3800" b="1" dirty="0">
+              <a:solidFill>
+                <a:schemeClr val="bg1"/>
+              </a:solidFill>
+              <a:latin typeface="微軟正黑體" panose="020B0604030504040204" pitchFamily="34" charset="-120"/>
+              <a:ea typeface="微軟正黑體" panose="020B0604030504040204" pitchFamily="34" charset="-120"/>
+            </a:endParaRPr>
+          </a:p>
+        </p:txBody>
+      </p:sp>
+    </p:spTree>
+    <p:extLst>
+      <p:ext uri="{BB962C8B-B14F-4D97-AF65-F5344CB8AC3E}">
+        <p14:creationId xmlns:p14="http://schemas.microsoft.com/office/powerpoint/2010/main" val="3540997513"/>
+      </p:ext>
+    </p:extLst>
+  </p:cSld>
+  <p:clrMapOvr>
+    <a:masterClrMapping/>
+  </p:clrMapOvr>
+</p:sld>
+</file>
+
+<file path=ppt/slides/slide5.xml><?xml version="1.0" encoding="utf-8"?>
+<p:sld xmlns:a="http://schemas.openxmlformats.org/drawingml/2006/main" xmlns:r="http://schemas.openxmlformats.org/officeDocument/2006/relationships" xmlns:p="http://schemas.openxmlformats.org/presentationml/2006/main">
+  <p:cSld>
+    <p:spTree>
+      <p:nvGrpSpPr>
+        <p:cNvPr id="1" name=""/>
+        <p:cNvGrpSpPr/>
+        <p:nvPr/>
+      </p:nvGrpSpPr>
+      <p:grpSpPr>
+        <a:xfrm>
+          <a:off x="0" y="0"/>
+          <a:ext cx="0" cy="0"/>
+          <a:chOff x="0" y="0"/>
+          <a:chExt cx="0" cy="0"/>
+        </a:xfrm>
+      </p:grpSpPr>
+      <p:pic>
+        <p:nvPicPr>
+          <p:cNvPr id="2" name="圖片 1">
+            <a:extLst>
+              <a:ext uri="{FF2B5EF4-FFF2-40B4-BE49-F238E27FC236}">
+                <a16:creationId xmlns:a16="http://schemas.microsoft.com/office/drawing/2014/main" id="{B81F9E98-CDE1-4C3D-B6D6-7BEC7FCEB5D4}"/>
+              </a:ext>
+            </a:extLst>
+          </p:cNvPr>
+          <p:cNvPicPr>
+            <a:picLocks noChangeAspect="1"/>
+          </p:cNvPicPr>
+          <p:nvPr/>
+        </p:nvPicPr>
+        <p:blipFill>
+          <a:blip r:embed="rId2">
+            <a:extLst>
+              <a:ext uri="{28A0092B-C50C-407E-A947-70E740481C1C}">
+                <a14:useLocalDpi xmlns:a14="http://schemas.microsoft.com/office/drawing/2010/main" val="0"/>
+              </a:ext>
+            </a:extLst>
+          </a:blip>
+          <a:stretch>
+            <a:fillRect/>
+          </a:stretch>
+        </p:blipFill>
+        <p:spPr>
+          <a:xfrm>
+            <a:off x="4742903" y="1780506"/>
+            <a:ext cx="2706194" cy="3296983"/>
+          </a:xfrm>
+          <a:prstGeom prst="rect">
+            <a:avLst/>
+          </a:prstGeom>
+        </p:spPr>
+      </p:pic>
+      <p:sp>
+        <p:nvSpPr>
+          <p:cNvPr id="3" name="矩形 2">
+            <a:extLst>
+              <a:ext uri="{FF2B5EF4-FFF2-40B4-BE49-F238E27FC236}">
+                <a16:creationId xmlns:a16="http://schemas.microsoft.com/office/drawing/2014/main" id="{307BE6FC-743A-4BB2-83C2-E7A5F14EC84C}"/>
+              </a:ext>
+            </a:extLst>
+          </p:cNvPr>
+          <p:cNvSpPr/>
+          <p:nvPr/>
+        </p:nvSpPr>
+        <p:spPr>
+          <a:xfrm>
+            <a:off x="4742903" y="1779889"/>
+            <a:ext cx="2725200" cy="3297600"/>
+          </a:xfrm>
+          <a:prstGeom prst="rect">
+            <a:avLst/>
+          </a:prstGeom>
+          <a:solidFill>
+            <a:schemeClr val="tx1">
+              <a:alpha val="55000"/>
+            </a:schemeClr>
+          </a:solidFill>
+          <a:ln>
+            <a:noFill/>
+          </a:ln>
+        </p:spPr>
+        <p:style>
+          <a:lnRef idx="2">
+            <a:schemeClr val="accent1">
+              <a:shade val="50000"/>
+            </a:schemeClr>
+          </a:lnRef>
+          <a:fillRef idx="1">
+            <a:schemeClr val="accent1"/>
+          </a:fillRef>
+          <a:effectRef idx="0">
+            <a:schemeClr val="accent1"/>
+          </a:effectRef>
+          <a:fontRef idx="minor">
+            <a:schemeClr val="lt1"/>
+          </a:fontRef>
+        </p:style>
+        <p:txBody>
+          <a:bodyPr rtlCol="0" anchor="ctr"/>
+          <a:lstStyle/>
+          <a:p>
+            <a:pPr algn="ctr"/>
+            <a:endParaRPr lang="zh-TW" altLang="en-US"/>
+          </a:p>
+        </p:txBody>
+      </p:sp>
+      <p:sp>
+        <p:nvSpPr>
+          <p:cNvPr id="4" name="文字方塊 3">
+            <a:extLst>
+              <a:ext uri="{FF2B5EF4-FFF2-40B4-BE49-F238E27FC236}">
+                <a16:creationId xmlns:a16="http://schemas.microsoft.com/office/drawing/2014/main" id="{905D7DBE-4B1A-459E-9E50-B52B419473AE}"/>
+              </a:ext>
+            </a:extLst>
+          </p:cNvPr>
+          <p:cNvSpPr txBox="1"/>
+          <p:nvPr/>
+        </p:nvSpPr>
+        <p:spPr>
+          <a:xfrm>
+            <a:off x="4742903" y="2797747"/>
+            <a:ext cx="2706194" cy="1261884"/>
+          </a:xfrm>
+          <a:prstGeom prst="rect">
+            <a:avLst/>
+          </a:prstGeom>
+          <a:noFill/>
+        </p:spPr>
+        <p:txBody>
+          <a:bodyPr wrap="square" rtlCol="0">
+            <a:spAutoFit/>
+          </a:bodyPr>
+          <a:lstStyle/>
+          <a:p>
+            <a:pPr algn="ctr"/>
+            <a:r>
+              <a:rPr lang="zh-TW" altLang="en-US" sz="3800" b="1" dirty="0">
+                <a:solidFill>
+                  <a:schemeClr val="bg1"/>
+                </a:solidFill>
+                <a:latin typeface="微軟正黑體" panose="020B0604030504040204" pitchFamily="34" charset="-120"/>
+                <a:ea typeface="微軟正黑體" panose="020B0604030504040204" pitchFamily="34" charset="-120"/>
+              </a:rPr>
+              <a:t>永續發展</a:t>
+            </a:r>
+            <a:endParaRPr lang="en-US" altLang="zh-TW" sz="3800" b="1" dirty="0">
+              <a:solidFill>
+                <a:schemeClr val="bg1"/>
+              </a:solidFill>
+              <a:latin typeface="微軟正黑體" panose="020B0604030504040204" pitchFamily="34" charset="-120"/>
+              <a:ea typeface="微軟正黑體" panose="020B0604030504040204" pitchFamily="34" charset="-120"/>
+            </a:endParaRPr>
+          </a:p>
+          <a:p>
+            <a:pPr algn="ctr"/>
+            <a:r>
+              <a:rPr lang="zh-TW" altLang="en-US" sz="3800" b="1" dirty="0">
+                <a:solidFill>
+                  <a:schemeClr val="bg1"/>
+                </a:solidFill>
+                <a:latin typeface="微軟正黑體" panose="020B0604030504040204" pitchFamily="34" charset="-120"/>
+                <a:ea typeface="微軟正黑體" panose="020B0604030504040204" pitchFamily="34" charset="-120"/>
+              </a:rPr>
+              <a:t>債券專版</a:t>
+            </a:r>
+            <a:endParaRPr lang="en-US" altLang="zh-TW" sz="3800" b="1" dirty="0">
+              <a:solidFill>
+                <a:schemeClr val="bg1"/>
+              </a:solidFill>
+              <a:latin typeface="微軟正黑體" panose="020B0604030504040204" pitchFamily="34" charset="-120"/>
+              <a:ea typeface="微軟正黑體" panose="020B0604030504040204" pitchFamily="34" charset="-120"/>
+            </a:endParaRPr>
+          </a:p>
+        </p:txBody>
+      </p:sp>
+    </p:spTree>
+    <p:extLst>
+      <p:ext uri="{BB962C8B-B14F-4D97-AF65-F5344CB8AC3E}">
+        <p14:creationId xmlns:p14="http://schemas.microsoft.com/office/powerpoint/2010/main" val="1444213093"/>
+      </p:ext>
+    </p:extLst>
+  </p:cSld>
+  <p:clrMapOvr>
+    <a:masterClrMapping/>
+  </p:clrMapOvr>
+</p:sld>
+</file>
+
+<file path=ppt/slides/slide6.xml><?xml version="1.0" encoding="utf-8"?>
+<p:sld xmlns:a="http://schemas.openxmlformats.org/drawingml/2006/main" xmlns:r="http://schemas.openxmlformats.org/officeDocument/2006/relationships" xmlns:p="http://schemas.openxmlformats.org/presentationml/2006/main">
+  <p:cSld>
+    <p:spTree>
+      <p:nvGrpSpPr>
+        <p:cNvPr id="1" name=""/>
+        <p:cNvGrpSpPr/>
+        <p:nvPr/>
+      </p:nvGrpSpPr>
+      <p:grpSpPr>
+        <a:xfrm>
+          <a:off x="0" y="0"/>
+          <a:ext cx="0" cy="0"/>
+          <a:chOff x="0" y="0"/>
+          <a:chExt cx="0" cy="0"/>
+        </a:xfrm>
+      </p:grpSpPr>
+      <p:pic>
+        <p:nvPicPr>
+          <p:cNvPr id="5" name="圖片 4">
+            <a:extLst>
+              <a:ext uri="{FF2B5EF4-FFF2-40B4-BE49-F238E27FC236}">
+                <a16:creationId xmlns:a16="http://schemas.microsoft.com/office/drawing/2014/main" id="{FFFBD0EF-A120-4E65-AF7A-D634DF16F801}"/>
+              </a:ext>
+            </a:extLst>
+          </p:cNvPr>
+          <p:cNvPicPr>
+            <a:picLocks noChangeAspect="1"/>
+          </p:cNvPicPr>
+          <p:nvPr/>
+        </p:nvPicPr>
+        <p:blipFill>
+          <a:blip r:embed="rId2">
+            <a:extLst>
+              <a:ext uri="{28A0092B-C50C-407E-A947-70E740481C1C}">
+                <a14:useLocalDpi xmlns:a14="http://schemas.microsoft.com/office/drawing/2010/main" val="0"/>
+              </a:ext>
+            </a:extLst>
+          </a:blip>
+          <a:stretch>
+            <a:fillRect/>
+          </a:stretch>
+        </p:blipFill>
+        <p:spPr>
+          <a:xfrm>
+            <a:off x="4742903" y="1780506"/>
+            <a:ext cx="2706194" cy="3296983"/>
+          </a:xfrm>
+          <a:prstGeom prst="rect">
+            <a:avLst/>
+          </a:prstGeom>
+        </p:spPr>
+      </p:pic>
+      <p:sp>
+        <p:nvSpPr>
+          <p:cNvPr id="2" name="矩形 1">
+            <a:extLst>
+              <a:ext uri="{FF2B5EF4-FFF2-40B4-BE49-F238E27FC236}">
+                <a16:creationId xmlns:a16="http://schemas.microsoft.com/office/drawing/2014/main" id="{61BFB777-FE51-3ED3-38DA-D6A0D9B91BAB}"/>
+              </a:ext>
+            </a:extLst>
+          </p:cNvPr>
+          <p:cNvSpPr/>
+          <p:nvPr/>
+        </p:nvSpPr>
+        <p:spPr>
+          <a:xfrm>
+            <a:off x="4742903" y="1779889"/>
+            <a:ext cx="2725200" cy="3297600"/>
+          </a:xfrm>
+          <a:prstGeom prst="rect">
+            <a:avLst/>
+          </a:prstGeom>
+          <a:solidFill>
+            <a:schemeClr val="tx1">
+              <a:alpha val="55000"/>
+            </a:schemeClr>
+          </a:solidFill>
+          <a:ln>
+            <a:noFill/>
+          </a:ln>
+        </p:spPr>
+        <p:style>
+          <a:lnRef idx="2">
+            <a:schemeClr val="accent1">
+              <a:shade val="50000"/>
+            </a:schemeClr>
+          </a:lnRef>
+          <a:fillRef idx="1">
+            <a:schemeClr val="accent1"/>
+          </a:fillRef>
+          <a:effectRef idx="0">
+            <a:schemeClr val="accent1"/>
+          </a:effectRef>
+          <a:fontRef idx="minor">
+            <a:schemeClr val="lt1"/>
+          </a:fontRef>
+        </p:style>
+        <p:txBody>
+          <a:bodyPr rtlCol="0" anchor="ctr"/>
+          <a:lstStyle/>
+          <a:p>
+            <a:pPr algn="ctr"/>
+            <a:endParaRPr lang="zh-TW" altLang="en-US"/>
+          </a:p>
+        </p:txBody>
+      </p:sp>
+      <p:sp>
+        <p:nvSpPr>
+          <p:cNvPr id="6" name="文字方塊 5">
+            <a:extLst>
+              <a:ext uri="{FF2B5EF4-FFF2-40B4-BE49-F238E27FC236}">
+                <a16:creationId xmlns:a16="http://schemas.microsoft.com/office/drawing/2014/main" id="{6B2548C2-D8FB-4034-877C-AEAF62DD46E9}"/>
+              </a:ext>
+            </a:extLst>
+          </p:cNvPr>
+          <p:cNvSpPr txBox="1"/>
+          <p:nvPr/>
+        </p:nvSpPr>
+        <p:spPr>
+          <a:xfrm>
+            <a:off x="4742903" y="2212971"/>
+            <a:ext cx="2706194" cy="2431435"/>
+          </a:xfrm>
+          <a:prstGeom prst="rect">
+            <a:avLst/>
+          </a:prstGeom>
+          <a:noFill/>
+        </p:spPr>
+        <p:txBody>
+          <a:bodyPr wrap="square" rtlCol="0">
+            <a:spAutoFit/>
+          </a:bodyPr>
+          <a:lstStyle/>
+          <a:p>
+            <a:pPr algn="ctr"/>
+            <a:r>
+              <a:rPr lang="zh-TW" altLang="en-US" sz="3800" b="1" dirty="0">
+                <a:solidFill>
+                  <a:schemeClr val="bg1"/>
+                </a:solidFill>
+                <a:latin typeface="微軟正黑體" panose="020B0604030504040204" pitchFamily="34" charset="-120"/>
+                <a:ea typeface="微軟正黑體" panose="020B0604030504040204" pitchFamily="34" charset="-120"/>
+              </a:rPr>
+              <a:t>臺灣</a:t>
+            </a:r>
+            <a:endParaRPr lang="en-US" altLang="zh-TW" sz="3800" b="1" dirty="0">
+              <a:solidFill>
+                <a:schemeClr val="bg1"/>
+              </a:solidFill>
+              <a:latin typeface="微軟正黑體" panose="020B0604030504040204" pitchFamily="34" charset="-120"/>
+              <a:ea typeface="微軟正黑體" panose="020B0604030504040204" pitchFamily="34" charset="-120"/>
+            </a:endParaRPr>
+          </a:p>
+          <a:p>
+            <a:pPr algn="ctr"/>
+            <a:r>
+              <a:rPr lang="zh-TW" altLang="en-US" sz="3800" b="1" dirty="0">
+                <a:solidFill>
+                  <a:schemeClr val="bg1"/>
+                </a:solidFill>
+                <a:latin typeface="微軟正黑體" panose="020B0604030504040204" pitchFamily="34" charset="-120"/>
+                <a:ea typeface="微軟正黑體" panose="020B0604030504040204" pitchFamily="34" charset="-120"/>
+              </a:rPr>
+              <a:t>第一個</a:t>
+            </a:r>
+            <a:endParaRPr lang="en-US" altLang="zh-TW" sz="3800" b="1" dirty="0">
+              <a:solidFill>
+                <a:schemeClr val="bg1"/>
+              </a:solidFill>
+              <a:latin typeface="微軟正黑體" panose="020B0604030504040204" pitchFamily="34" charset="-120"/>
+              <a:ea typeface="微軟正黑體" panose="020B0604030504040204" pitchFamily="34" charset="-120"/>
+            </a:endParaRPr>
+          </a:p>
+          <a:p>
+            <a:pPr algn="ctr"/>
+            <a:r>
+              <a:rPr lang="zh-TW" altLang="en-US" sz="3800" b="1" dirty="0">
+                <a:solidFill>
+                  <a:schemeClr val="bg1"/>
+                </a:solidFill>
+                <a:latin typeface="微軟正黑體" panose="020B0604030504040204" pitchFamily="34" charset="-120"/>
+                <a:ea typeface="微軟正黑體" panose="020B0604030504040204" pitchFamily="34" charset="-120"/>
+              </a:rPr>
+              <a:t>氣候指數</a:t>
+            </a:r>
+            <a:endParaRPr lang="en-US" altLang="zh-TW" sz="3800" b="1" dirty="0">
+              <a:solidFill>
+                <a:schemeClr val="bg1"/>
+              </a:solidFill>
+              <a:latin typeface="微軟正黑體" panose="020B0604030504040204" pitchFamily="34" charset="-120"/>
+              <a:ea typeface="微軟正黑體" panose="020B0604030504040204" pitchFamily="34" charset="-120"/>
+            </a:endParaRPr>
+          </a:p>
+          <a:p>
+            <a:pPr algn="ctr"/>
+            <a:r>
+              <a:rPr lang="zh-TW" altLang="en-US" sz="3800" b="1" dirty="0">
+                <a:solidFill>
+                  <a:schemeClr val="bg1"/>
+                </a:solidFill>
+                <a:latin typeface="微軟正黑體" panose="020B0604030504040204" pitchFamily="34" charset="-120"/>
+                <a:ea typeface="微軟正黑體" panose="020B0604030504040204" pitchFamily="34" charset="-120"/>
+              </a:rPr>
+              <a:t>系列</a:t>
+            </a:r>
+            <a:endParaRPr lang="en-US" altLang="zh-TW" sz="3800" b="1" dirty="0">
+              <a:solidFill>
+                <a:schemeClr val="bg1"/>
+              </a:solidFill>
+              <a:latin typeface="微軟正黑體" panose="020B0604030504040204" pitchFamily="34" charset="-120"/>
+              <a:ea typeface="微軟正黑體" panose="020B0604030504040204" pitchFamily="34" charset="-120"/>
+            </a:endParaRPr>
+          </a:p>
+        </p:txBody>
+      </p:sp>
+    </p:spTree>
+    <p:extLst>
+      <p:ext uri="{BB962C8B-B14F-4D97-AF65-F5344CB8AC3E}">
+        <p14:creationId xmlns:p14="http://schemas.microsoft.com/office/powerpoint/2010/main" val="4001971282"/>
+      </p:ext>
+    </p:extLst>
+  </p:cSld>
+  <p:clrMapOvr>
+    <a:masterClrMapping/>
+  </p:clrMapOvr>
+</p:sld>
+</file>
+
+<file path=ppt/slides/slide7.xml><?xml version="1.0" encoding="utf-8"?>
+<p:sld xmlns:a="http://schemas.openxmlformats.org/drawingml/2006/main" xmlns:r="http://schemas.openxmlformats.org/officeDocument/2006/relationships" xmlns:p="http://schemas.openxmlformats.org/presentationml/2006/main">
+  <p:cSld>
+    <p:spTree>
+      <p:nvGrpSpPr>
+        <p:cNvPr id="1" name=""/>
+        <p:cNvGrpSpPr/>
+        <p:nvPr/>
+      </p:nvGrpSpPr>
+      <p:grpSpPr>
+        <a:xfrm>
+          <a:off x="0" y="0"/>
+          <a:ext cx="0" cy="0"/>
+          <a:chOff x="0" y="0"/>
+          <a:chExt cx="0" cy="0"/>
+        </a:xfrm>
+      </p:grpSpPr>
+      <p:pic>
+        <p:nvPicPr>
+          <p:cNvPr id="4" name="圖片 3">
+            <a:extLst>
+              <a:ext uri="{FF2B5EF4-FFF2-40B4-BE49-F238E27FC236}">
+                <a16:creationId xmlns:a16="http://schemas.microsoft.com/office/drawing/2014/main" id="{57964F93-6827-4847-87C5-EF712F39C0F3}"/>
+              </a:ext>
+            </a:extLst>
+          </p:cNvPr>
+          <p:cNvPicPr>
+            <a:picLocks noChangeAspect="1"/>
+          </p:cNvPicPr>
+          <p:nvPr/>
+        </p:nvPicPr>
+        <p:blipFill>
+          <a:blip r:embed="rId2">
+            <a:extLst>
+              <a:ext uri="{28A0092B-C50C-407E-A947-70E740481C1C}">
+                <a14:useLocalDpi xmlns:a14="http://schemas.microsoft.com/office/drawing/2010/main" val="0"/>
+              </a:ext>
+            </a:extLst>
+          </a:blip>
+          <a:stretch>
+            <a:fillRect/>
+          </a:stretch>
+        </p:blipFill>
+        <p:spPr>
+          <a:xfrm>
+            <a:off x="4742903" y="1780506"/>
+            <a:ext cx="2706194" cy="3296983"/>
+          </a:xfrm>
+          <a:prstGeom prst="rect">
+            <a:avLst/>
+          </a:prstGeom>
+        </p:spPr>
+      </p:pic>
+      <p:sp>
+        <p:nvSpPr>
+          <p:cNvPr id="5" name="矩形 4">
+            <a:extLst>
+              <a:ext uri="{FF2B5EF4-FFF2-40B4-BE49-F238E27FC236}">
+                <a16:creationId xmlns:a16="http://schemas.microsoft.com/office/drawing/2014/main" id="{1281BE83-38F5-4DD7-A5D5-A2808CC4A05F}"/>
+              </a:ext>
+            </a:extLst>
+          </p:cNvPr>
+          <p:cNvSpPr/>
+          <p:nvPr/>
+        </p:nvSpPr>
+        <p:spPr>
+          <a:xfrm>
+            <a:off x="4742903" y="1779889"/>
+            <a:ext cx="2725200" cy="3297600"/>
+          </a:xfrm>
+          <a:prstGeom prst="rect">
+            <a:avLst/>
+          </a:prstGeom>
+          <a:solidFill>
+            <a:schemeClr val="tx1">
+              <a:alpha val="55000"/>
+            </a:schemeClr>
+          </a:solidFill>
+          <a:ln>
+            <a:noFill/>
+          </a:ln>
+        </p:spPr>
+        <p:style>
+          <a:lnRef idx="2">
+            <a:schemeClr val="accent1">
+              <a:shade val="50000"/>
+            </a:schemeClr>
+          </a:lnRef>
+          <a:fillRef idx="1">
+            <a:schemeClr val="accent1"/>
+          </a:fillRef>
+          <a:effectRef idx="0">
+            <a:schemeClr val="accent1"/>
+          </a:effectRef>
+          <a:fontRef idx="minor">
+            <a:schemeClr val="lt1"/>
+          </a:fontRef>
+        </p:style>
+        <p:txBody>
+          <a:bodyPr rtlCol="0" anchor="ctr"/>
+          <a:lstStyle/>
+          <a:p>
+            <a:pPr algn="ctr"/>
+            <a:endParaRPr lang="zh-TW" altLang="en-US"/>
+          </a:p>
+        </p:txBody>
+      </p:sp>
+      <p:sp>
+        <p:nvSpPr>
+          <p:cNvPr id="6" name="文字方塊 5">
+            <a:extLst>
+              <a:ext uri="{FF2B5EF4-FFF2-40B4-BE49-F238E27FC236}">
+                <a16:creationId xmlns:a16="http://schemas.microsoft.com/office/drawing/2014/main" id="{64C01C6A-1313-44AD-8A3B-07A01F88FCD5}"/>
+              </a:ext>
+            </a:extLst>
+          </p:cNvPr>
+          <p:cNvSpPr txBox="1"/>
+          <p:nvPr/>
+        </p:nvSpPr>
+        <p:spPr>
+          <a:xfrm>
+            <a:off x="4742903" y="1920584"/>
+            <a:ext cx="2706194" cy="3016210"/>
+          </a:xfrm>
+          <a:prstGeom prst="rect">
+            <a:avLst/>
+          </a:prstGeom>
+          <a:noFill/>
+        </p:spPr>
+        <p:txBody>
+          <a:bodyPr wrap="square" rtlCol="0">
+            <a:spAutoFit/>
+          </a:bodyPr>
+          <a:lstStyle/>
+          <a:p>
+            <a:pPr algn="ctr"/>
+            <a:r>
+              <a:rPr lang="en-US" altLang="zh-TW" sz="3800" b="1" dirty="0">
+                <a:solidFill>
+                  <a:schemeClr val="bg1"/>
+                </a:solidFill>
+                <a:latin typeface="微軟正黑體" panose="020B0604030504040204" pitchFamily="34" charset="-120"/>
+                <a:ea typeface="微軟正黑體" panose="020B0604030504040204" pitchFamily="34" charset="-120"/>
+              </a:rPr>
+              <a:t>TPEX FactSet</a:t>
+            </a:r>
+          </a:p>
+          <a:p>
+            <a:pPr algn="ctr"/>
+            <a:r>
+              <a:rPr lang="zh-TW" altLang="en-US" sz="3800" b="1" dirty="0">
+                <a:solidFill>
+                  <a:schemeClr val="bg1"/>
+                </a:solidFill>
+                <a:latin typeface="微軟正黑體" panose="020B0604030504040204" pitchFamily="34" charset="-120"/>
+                <a:ea typeface="微軟正黑體" panose="020B0604030504040204" pitchFamily="34" charset="-120"/>
+              </a:rPr>
+              <a:t>氣候韌性</a:t>
+            </a:r>
+            <a:endParaRPr lang="en-US" altLang="zh-TW" sz="3800" b="1" dirty="0">
+              <a:solidFill>
+                <a:schemeClr val="bg1"/>
+              </a:solidFill>
+              <a:latin typeface="微軟正黑體" panose="020B0604030504040204" pitchFamily="34" charset="-120"/>
+              <a:ea typeface="微軟正黑體" panose="020B0604030504040204" pitchFamily="34" charset="-120"/>
+            </a:endParaRPr>
+          </a:p>
+          <a:p>
+            <a:pPr algn="ctr"/>
+            <a:r>
+              <a:rPr lang="zh-TW" altLang="en-US" sz="3800" b="1" dirty="0">
+                <a:solidFill>
+                  <a:schemeClr val="bg1"/>
+                </a:solidFill>
+                <a:latin typeface="微軟正黑體" panose="020B0604030504040204" pitchFamily="34" charset="-120"/>
+                <a:ea typeface="微軟正黑體" panose="020B0604030504040204" pitchFamily="34" charset="-120"/>
+              </a:rPr>
+              <a:t>指數系列</a:t>
+            </a:r>
+            <a:endParaRPr lang="en-US" altLang="zh-TW" sz="3800" b="1" dirty="0">
+              <a:solidFill>
+                <a:schemeClr val="bg1"/>
+              </a:solidFill>
+              <a:latin typeface="微軟正黑體" panose="020B0604030504040204" pitchFamily="34" charset="-120"/>
+              <a:ea typeface="微軟正黑體" panose="020B0604030504040204" pitchFamily="34" charset="-120"/>
+            </a:endParaRPr>
+          </a:p>
+          <a:p>
+            <a:pPr algn="ctr"/>
+            <a:r>
+              <a:rPr lang="zh-TW" altLang="en-US" sz="3800" b="1" dirty="0">
+                <a:solidFill>
+                  <a:schemeClr val="bg1"/>
+                </a:solidFill>
+                <a:latin typeface="微軟正黑體" panose="020B0604030504040204" pitchFamily="34" charset="-120"/>
+                <a:ea typeface="微軟正黑體" panose="020B0604030504040204" pitchFamily="34" charset="-120"/>
+              </a:rPr>
+              <a:t>編製者</a:t>
+            </a:r>
+            <a:endParaRPr lang="en-US" altLang="zh-TW" sz="3800" b="1" dirty="0">
+              <a:solidFill>
+                <a:schemeClr val="bg1"/>
+              </a:solidFill>
+              <a:latin typeface="微軟正黑體" panose="020B0604030504040204" pitchFamily="34" charset="-120"/>
+              <a:ea typeface="微軟正黑體" panose="020B0604030504040204" pitchFamily="34" charset="-120"/>
+            </a:endParaRPr>
+          </a:p>
+        </p:txBody>
+      </p:sp>
+    </p:spTree>
+    <p:extLst>
+      <p:ext uri="{BB962C8B-B14F-4D97-AF65-F5344CB8AC3E}">
+        <p14:creationId xmlns:p14="http://schemas.microsoft.com/office/powerpoint/2010/main" val="3231514704"/>
+      </p:ext>
+    </p:extLst>
+  </p:cSld>
+  <p:clrMapOvr>
+    <a:masterClrMapping/>
+  </p:clrMapOvr>
+</p:sld>
+</file>
+
+<file path=ppt/slides/slide8.xml><?xml version="1.0" encoding="utf-8"?>
+<p:sld xmlns:a="http://schemas.openxmlformats.org/drawingml/2006/main" xmlns:r="http://schemas.openxmlformats.org/officeDocument/2006/relationships" xmlns:p="http://schemas.openxmlformats.org/presentationml/2006/main">
+  <p:cSld>
+    <p:spTree>
+      <p:nvGrpSpPr>
+        <p:cNvPr id="1" name=""/>
+        <p:cNvGrpSpPr/>
+        <p:nvPr/>
+      </p:nvGrpSpPr>
+      <p:grpSpPr>
+        <a:xfrm>
+          <a:off x="0" y="0"/>
+          <a:ext cx="0" cy="0"/>
+          <a:chOff x="0" y="0"/>
+          <a:chExt cx="0" cy="0"/>
+        </a:xfrm>
+      </p:grpSpPr>
+      <p:pic>
+        <p:nvPicPr>
+          <p:cNvPr id="2" name="圖片 1">
+            <a:extLst>
+              <a:ext uri="{FF2B5EF4-FFF2-40B4-BE49-F238E27FC236}">
+                <a16:creationId xmlns:a16="http://schemas.microsoft.com/office/drawing/2014/main" id="{7860B9A1-C668-4196-AFA0-45FF2B755068}"/>
+              </a:ext>
+            </a:extLst>
+          </p:cNvPr>
+          <p:cNvPicPr>
+            <a:picLocks noChangeAspect="1"/>
+          </p:cNvPicPr>
+          <p:nvPr/>
+        </p:nvPicPr>
+        <p:blipFill>
+          <a:blip r:embed="rId2">
+            <a:extLst>
+              <a:ext uri="{28A0092B-C50C-407E-A947-70E740481C1C}">
+                <a14:useLocalDpi xmlns:a14="http://schemas.microsoft.com/office/drawing/2010/main" val="0"/>
+              </a:ext>
+            </a:extLst>
+          </a:blip>
+          <a:stretch>
+            <a:fillRect/>
+          </a:stretch>
+        </p:blipFill>
+        <p:spPr>
+          <a:xfrm>
+            <a:off x="4742903" y="1780506"/>
+            <a:ext cx="2706194" cy="3296983"/>
+          </a:xfrm>
+          <a:prstGeom prst="rect">
+            <a:avLst/>
+          </a:prstGeom>
+        </p:spPr>
+      </p:pic>
+      <p:sp>
+        <p:nvSpPr>
+          <p:cNvPr id="3" name="矩形 2">
+            <a:extLst>
+              <a:ext uri="{FF2B5EF4-FFF2-40B4-BE49-F238E27FC236}">
+                <a16:creationId xmlns:a16="http://schemas.microsoft.com/office/drawing/2014/main" id="{E6F9FFB1-47EC-4B85-BDA0-94748EAD1C84}"/>
+              </a:ext>
+            </a:extLst>
+          </p:cNvPr>
+          <p:cNvSpPr/>
+          <p:nvPr/>
+        </p:nvSpPr>
+        <p:spPr>
+          <a:xfrm>
+            <a:off x="4742903" y="1779889"/>
+            <a:ext cx="2725200" cy="3297600"/>
+          </a:xfrm>
+          <a:prstGeom prst="rect">
+            <a:avLst/>
+          </a:prstGeom>
+          <a:solidFill>
+            <a:schemeClr val="tx1">
+              <a:alpha val="55000"/>
+            </a:schemeClr>
+          </a:solidFill>
+          <a:ln>
+            <a:noFill/>
+          </a:ln>
+        </p:spPr>
+        <p:style>
+          <a:lnRef idx="2">
+            <a:schemeClr val="accent1">
+              <a:shade val="50000"/>
+            </a:schemeClr>
+          </a:lnRef>
+          <a:fillRef idx="1">
+            <a:schemeClr val="accent1"/>
+          </a:fillRef>
+          <a:effectRef idx="0">
+            <a:schemeClr val="accent1"/>
+          </a:effectRef>
+          <a:fontRef idx="minor">
+            <a:schemeClr val="lt1"/>
+          </a:fontRef>
+        </p:style>
+        <p:txBody>
+          <a:bodyPr rtlCol="0" anchor="ctr"/>
+          <a:lstStyle/>
+          <a:p>
+            <a:pPr algn="ctr"/>
+            <a:endParaRPr lang="zh-TW" altLang="en-US"/>
+          </a:p>
+        </p:txBody>
+      </p:sp>
+      <p:sp>
+        <p:nvSpPr>
+          <p:cNvPr id="4" name="文字方塊 3">
+            <a:extLst>
+              <a:ext uri="{FF2B5EF4-FFF2-40B4-BE49-F238E27FC236}">
+                <a16:creationId xmlns:a16="http://schemas.microsoft.com/office/drawing/2014/main" id="{F2921D62-0CE4-4F05-9DD1-1C743A58BC24}"/>
+              </a:ext>
+            </a:extLst>
+          </p:cNvPr>
+          <p:cNvSpPr txBox="1"/>
+          <p:nvPr/>
+        </p:nvSpPr>
+        <p:spPr>
+          <a:xfrm>
+            <a:off x="4742903" y="1920584"/>
+            <a:ext cx="2706194" cy="3016210"/>
+          </a:xfrm>
+          <a:prstGeom prst="rect">
+            <a:avLst/>
+          </a:prstGeom>
+          <a:noFill/>
+        </p:spPr>
+        <p:txBody>
+          <a:bodyPr wrap="square" rtlCol="0">
+            <a:spAutoFit/>
+          </a:bodyPr>
+          <a:lstStyle/>
+          <a:p>
+            <a:pPr algn="ctr"/>
+            <a:r>
+              <a:rPr lang="en-US" altLang="zh-TW" sz="3800" b="1" dirty="0">
+                <a:solidFill>
+                  <a:schemeClr val="bg1"/>
+                </a:solidFill>
+                <a:latin typeface="微軟正黑體" panose="020B0604030504040204" pitchFamily="34" charset="-120"/>
+                <a:ea typeface="微軟正黑體" panose="020B0604030504040204" pitchFamily="34" charset="-120"/>
+              </a:rPr>
+              <a:t>TPEX</a:t>
+            </a:r>
+          </a:p>
+          <a:p>
+            <a:pPr algn="ctr"/>
+            <a:r>
+              <a:rPr lang="en-US" altLang="zh-TW" sz="3800" b="1" dirty="0">
+                <a:solidFill>
+                  <a:schemeClr val="bg1"/>
+                </a:solidFill>
+                <a:latin typeface="微軟正黑體" panose="020B0604030504040204" pitchFamily="34" charset="-120"/>
+                <a:ea typeface="微軟正黑體" panose="020B0604030504040204" pitchFamily="34" charset="-120"/>
+              </a:rPr>
+              <a:t>FactSet</a:t>
+            </a:r>
+          </a:p>
+          <a:p>
+            <a:pPr algn="ctr"/>
+            <a:r>
+              <a:rPr lang="zh-TW" altLang="en-US" sz="3800" b="1" dirty="0">
+                <a:solidFill>
+                  <a:schemeClr val="bg1"/>
+                </a:solidFill>
+                <a:latin typeface="微軟正黑體" panose="020B0604030504040204" pitchFamily="34" charset="-120"/>
+                <a:ea typeface="微軟正黑體" panose="020B0604030504040204" pitchFamily="34" charset="-120"/>
+              </a:rPr>
+              <a:t>氣候韌性</a:t>
+            </a:r>
+            <a:endParaRPr lang="en-US" altLang="zh-TW" sz="3800" b="1" dirty="0">
+              <a:solidFill>
+                <a:schemeClr val="bg1"/>
+              </a:solidFill>
+              <a:latin typeface="微軟正黑體" panose="020B0604030504040204" pitchFamily="34" charset="-120"/>
+              <a:ea typeface="微軟正黑體" panose="020B0604030504040204" pitchFamily="34" charset="-120"/>
+            </a:endParaRPr>
+          </a:p>
+          <a:p>
+            <a:pPr algn="ctr"/>
+            <a:r>
+              <a:rPr lang="zh-TW" altLang="en-US" sz="3800" b="1" dirty="0">
+                <a:solidFill>
+                  <a:schemeClr val="bg1"/>
+                </a:solidFill>
+                <a:latin typeface="微軟正黑體" panose="020B0604030504040204" pitchFamily="34" charset="-120"/>
+                <a:ea typeface="微軟正黑體" panose="020B0604030504040204" pitchFamily="34" charset="-120"/>
+              </a:rPr>
+              <a:t>指數系列</a:t>
+            </a:r>
+            <a:endParaRPr lang="en-US" altLang="zh-TW" sz="3800" b="1" dirty="0">
+              <a:solidFill>
+                <a:schemeClr val="bg1"/>
+              </a:solidFill>
+              <a:latin typeface="微軟正黑體" panose="020B0604030504040204" pitchFamily="34" charset="-120"/>
+              <a:ea typeface="微軟正黑體" panose="020B0604030504040204" pitchFamily="34" charset="-120"/>
+            </a:endParaRPr>
+          </a:p>
+          <a:p>
+            <a:pPr algn="ctr"/>
+            <a:r>
+              <a:rPr lang="zh-TW" altLang="en-US" sz="3800" b="1" dirty="0">
+                <a:solidFill>
+                  <a:schemeClr val="bg1"/>
+                </a:solidFill>
+                <a:latin typeface="微軟正黑體" panose="020B0604030504040204" pitchFamily="34" charset="-120"/>
+                <a:ea typeface="微軟正黑體" panose="020B0604030504040204" pitchFamily="34" charset="-120"/>
+              </a:rPr>
+              <a:t>有幾支指數</a:t>
+            </a:r>
+            <a:endParaRPr lang="en-US" altLang="zh-TW" sz="3800" b="1" dirty="0">
+              <a:solidFill>
+                <a:schemeClr val="bg1"/>
+              </a:solidFill>
+              <a:latin typeface="微軟正黑體" panose="020B0604030504040204" pitchFamily="34" charset="-120"/>
+              <a:ea typeface="微軟正黑體" panose="020B0604030504040204" pitchFamily="34" charset="-120"/>
+            </a:endParaRPr>
+          </a:p>
+        </p:txBody>
+      </p:sp>
+    </p:spTree>
+    <p:extLst>
+      <p:ext uri="{BB962C8B-B14F-4D97-AF65-F5344CB8AC3E}">
+        <p14:creationId xmlns:p14="http://schemas.microsoft.com/office/powerpoint/2010/main" val="1082274310"/>
+      </p:ext>
+    </p:extLst>
+  </p:cSld>
+  <p:clrMapOvr>
+    <a:masterClrMapping/>
+  </p:clrMapOvr>
+</p:sld>
+</file>
+
+<file path=ppt/slides/slide9.xml><?xml version="1.0" encoding="utf-8"?>
+<p:sld xmlns:a="http://schemas.openxmlformats.org/drawingml/2006/main" xmlns:r="http://schemas.openxmlformats.org/officeDocument/2006/relationships" xmlns:p="http://schemas.openxmlformats.org/presentationml/2006/main">
+  <p:cSld>
+    <p:spTree>
+      <p:nvGrpSpPr>
+        <p:cNvPr id="1" name=""/>
+        <p:cNvGrpSpPr/>
+        <p:nvPr/>
+      </p:nvGrpSpPr>
+      <p:grpSpPr>
+        <a:xfrm>
+          <a:off x="0" y="0"/>
+          <a:ext cx="0" cy="0"/>
+          <a:chOff x="0" y="0"/>
+          <a:chExt cx="0" cy="0"/>
+        </a:xfrm>
+      </p:grpSpPr>
+      <p:pic>
+        <p:nvPicPr>
+          <p:cNvPr id="2" name="圖片 1">
+            <a:extLst>
+              <a:ext uri="{FF2B5EF4-FFF2-40B4-BE49-F238E27FC236}">
+                <a16:creationId xmlns:a16="http://schemas.microsoft.com/office/drawing/2014/main" id="{5F7C2F9B-2963-4E5F-B5C2-8AEF83A875EF}"/>
+              </a:ext>
+            </a:extLst>
+          </p:cNvPr>
+          <p:cNvPicPr>
+            <a:picLocks noChangeAspect="1"/>
+          </p:cNvPicPr>
+          <p:nvPr/>
+        </p:nvPicPr>
+        <p:blipFill>
+          <a:blip r:embed="rId2">
+            <a:extLst>
+              <a:ext uri="{28A0092B-C50C-407E-A947-70E740481C1C}">
+                <a14:useLocalDpi xmlns:a14="http://schemas.microsoft.com/office/drawing/2010/main" val="0"/>
+              </a:ext>
+            </a:extLst>
+          </a:blip>
+          <a:stretch>
+            <a:fillRect/>
+          </a:stretch>
+        </p:blipFill>
+        <p:spPr>
+          <a:xfrm>
+            <a:off x="4742903" y="1780506"/>
+            <a:ext cx="2706194" cy="3296983"/>
+          </a:xfrm>
+          <a:prstGeom prst="rect">
+            <a:avLst/>
+          </a:prstGeom>
+        </p:spPr>
+      </p:pic>
+      <p:sp>
+        <p:nvSpPr>
+          <p:cNvPr id="3" name="矩形 2">
+            <a:extLst>
+              <a:ext uri="{FF2B5EF4-FFF2-40B4-BE49-F238E27FC236}">
+                <a16:creationId xmlns:a16="http://schemas.microsoft.com/office/drawing/2014/main" id="{8327AB8E-6738-41B6-BBCB-C2151A12B0B5}"/>
+              </a:ext>
+            </a:extLst>
+          </p:cNvPr>
+          <p:cNvSpPr/>
+          <p:nvPr/>
+        </p:nvSpPr>
+        <p:spPr>
+          <a:xfrm>
+            <a:off x="4742903" y="1779889"/>
+            <a:ext cx="2725200" cy="3297600"/>
+          </a:xfrm>
+          <a:prstGeom prst="rect">
+            <a:avLst/>
+          </a:prstGeom>
+          <a:solidFill>
+            <a:schemeClr val="tx1">
+              <a:alpha val="55000"/>
+            </a:schemeClr>
+          </a:solidFill>
+          <a:ln>
+            <a:noFill/>
+          </a:ln>
+        </p:spPr>
+        <p:style>
+          <a:lnRef idx="2">
+            <a:schemeClr val="accent1">
+              <a:shade val="50000"/>
+            </a:schemeClr>
+          </a:lnRef>
+          <a:fillRef idx="1">
+            <a:schemeClr val="accent1"/>
+          </a:fillRef>
+          <a:effectRef idx="0">
+            <a:schemeClr val="accent1"/>
+          </a:effectRef>
+          <a:fontRef idx="minor">
+            <a:schemeClr val="lt1"/>
+          </a:fontRef>
+        </p:style>
+        <p:txBody>
+          <a:bodyPr rtlCol="0" anchor="ctr"/>
+          <a:lstStyle/>
+          <a:p>
+            <a:pPr algn="ctr"/>
+            <a:endParaRPr lang="zh-TW" altLang="en-US"/>
+          </a:p>
+        </p:txBody>
+      </p:sp>
+      <p:sp>
+        <p:nvSpPr>
+          <p:cNvPr id="4" name="文字方塊 3">
+            <a:extLst>
+              <a:ext uri="{FF2B5EF4-FFF2-40B4-BE49-F238E27FC236}">
+                <a16:creationId xmlns:a16="http://schemas.microsoft.com/office/drawing/2014/main" id="{0464A269-F5EF-4658-824C-CC96551FAC82}"/>
+              </a:ext>
+            </a:extLst>
+          </p:cNvPr>
+          <p:cNvSpPr txBox="1"/>
+          <p:nvPr/>
+        </p:nvSpPr>
+        <p:spPr>
+          <a:xfrm>
+            <a:off x="4742903" y="1920584"/>
+            <a:ext cx="2706194" cy="3016210"/>
+          </a:xfrm>
+          <a:prstGeom prst="rect">
+            <a:avLst/>
+          </a:prstGeom>
+          <a:noFill/>
+        </p:spPr>
+        <p:txBody>
+          <a:bodyPr wrap="square" rtlCol="0">
+            <a:spAutoFit/>
+          </a:bodyPr>
+          <a:lstStyle/>
+          <a:p>
+            <a:pPr algn="ctr"/>
+            <a:r>
+              <a:rPr lang="en-US" altLang="zh-TW" sz="3800" b="1" dirty="0">
+                <a:solidFill>
+                  <a:schemeClr val="bg1"/>
+                </a:solidFill>
+                <a:latin typeface="微軟正黑體" panose="020B0604030504040204" pitchFamily="34" charset="-120"/>
+                <a:ea typeface="微軟正黑體" panose="020B0604030504040204" pitchFamily="34" charset="-120"/>
+              </a:rPr>
+              <a:t>TPEX </a:t>
+            </a:r>
+          </a:p>
+          <a:p>
+            <a:pPr algn="ctr"/>
+            <a:r>
+              <a:rPr lang="en-US" altLang="zh-TW" sz="3800" b="1" dirty="0">
+                <a:solidFill>
+                  <a:schemeClr val="bg1"/>
+                </a:solidFill>
+                <a:latin typeface="微軟正黑體" panose="020B0604030504040204" pitchFamily="34" charset="-120"/>
+                <a:ea typeface="微軟正黑體" panose="020B0604030504040204" pitchFamily="34" charset="-120"/>
+              </a:rPr>
+              <a:t>FactSet</a:t>
+            </a:r>
+          </a:p>
+          <a:p>
+            <a:pPr algn="ctr"/>
+            <a:r>
+              <a:rPr lang="zh-TW" altLang="en-US" sz="3800" b="1" dirty="0">
+                <a:solidFill>
+                  <a:schemeClr val="bg1"/>
+                </a:solidFill>
+                <a:latin typeface="微軟正黑體" panose="020B0604030504040204" pitchFamily="34" charset="-120"/>
+                <a:ea typeface="微軟正黑體" panose="020B0604030504040204" pitchFamily="34" charset="-120"/>
+              </a:rPr>
+              <a:t>氣候韌性</a:t>
+            </a:r>
+            <a:endParaRPr lang="en-US" altLang="zh-TW" sz="3800" b="1" dirty="0">
+              <a:solidFill>
+                <a:schemeClr val="bg1"/>
+              </a:solidFill>
+              <a:latin typeface="微軟正黑體" panose="020B0604030504040204" pitchFamily="34" charset="-120"/>
+              <a:ea typeface="微軟正黑體" panose="020B0604030504040204" pitchFamily="34" charset="-120"/>
+            </a:endParaRPr>
+          </a:p>
+          <a:p>
+            <a:pPr algn="ctr"/>
+            <a:r>
+              <a:rPr lang="zh-TW" altLang="en-US" sz="3800" b="1" dirty="0">
+                <a:solidFill>
+                  <a:schemeClr val="bg1"/>
+                </a:solidFill>
+                <a:latin typeface="微軟正黑體" panose="020B0604030504040204" pitchFamily="34" charset="-120"/>
+                <a:ea typeface="微軟正黑體" panose="020B0604030504040204" pitchFamily="34" charset="-120"/>
+              </a:rPr>
+              <a:t>指數系列</a:t>
+            </a:r>
+            <a:endParaRPr lang="en-US" altLang="zh-TW" sz="3800" b="1" dirty="0">
+              <a:solidFill>
+                <a:schemeClr val="bg1"/>
+              </a:solidFill>
+              <a:latin typeface="微軟正黑體" panose="020B0604030504040204" pitchFamily="34" charset="-120"/>
+              <a:ea typeface="微軟正黑體" panose="020B0604030504040204" pitchFamily="34" charset="-120"/>
+            </a:endParaRPr>
+          </a:p>
+          <a:p>
+            <a:pPr algn="ctr"/>
+            <a:r>
+              <a:rPr lang="zh-TW" altLang="en-US" sz="3800" b="1" dirty="0">
+                <a:solidFill>
+                  <a:schemeClr val="bg1"/>
+                </a:solidFill>
+                <a:latin typeface="微軟正黑體" panose="020B0604030504040204" pitchFamily="34" charset="-120"/>
+                <a:ea typeface="微軟正黑體" panose="020B0604030504040204" pitchFamily="34" charset="-120"/>
+              </a:rPr>
+              <a:t>發布日</a:t>
+            </a:r>
+            <a:endParaRPr lang="en-US" altLang="zh-TW" sz="3800" b="1" dirty="0">
+              <a:solidFill>
+                <a:schemeClr val="bg1"/>
+              </a:solidFill>
+              <a:latin typeface="微軟正黑體" panose="020B0604030504040204" pitchFamily="34" charset="-120"/>
+              <a:ea typeface="微軟正黑體" panose="020B0604030504040204" pitchFamily="34" charset="-120"/>
+            </a:endParaRPr>
+          </a:p>
+        </p:txBody>
+      </p:sp>
+    </p:spTree>
+    <p:extLst>
+      <p:ext uri="{BB962C8B-B14F-4D97-AF65-F5344CB8AC3E}">
+        <p14:creationId xmlns:p14="http://schemas.microsoft.com/office/powerpoint/2010/main" val="3765665663"/>
       </p:ext>
     </p:extLst>
   </p:cSld>
